--- a/app/examples/marketing_analytics/report.pptx
+++ b/app/examples/marketing_analytics/report.pptx
@@ -3117,11 +3117,11 @@
             <a:r>
               <a:rPr sz="4600" b="1">
                 <a:solidFill>
-                  <a:srgbClr val="1F2A44"/>
-                </a:solidFill>
-                <a:latin typeface="Georgia"/>
+                  <a:srgbClr val="3A2008"/>
+                </a:solidFill>
+                <a:latin typeface="Verdana"/>
               </a:rPr>
-              <a:t>Revenue Growth and Channel Insights</a:t>
+              <a:t>May 2026 Revenue Performance</a:t>
             </a:r>
           </a:p>
         </p:txBody>
@@ -3153,7 +3153,7 @@
                 <a:solidFill>
                   <a:srgbClr val="7A828C"/>
                 </a:solidFill>
-                <a:latin typeface="Arial"/>
+                <a:latin typeface="Verdana"/>
               </a:rPr>
               <a:t>Period 2026-05  |  source table: ex_marketing_analytics</a:t>
             </a:r>
@@ -3187,9 +3187,9 @@
                 <a:solidFill>
                   <a:srgbClr val="7A828C"/>
                 </a:solidFill>
-                <a:latin typeface="Arial"/>
+                <a:latin typeface="Verdana"/>
               </a:rPr>
-              <a:t>Generated 2026-06-10 15:45 UTC   |   CONFIDENTIAL</a:t>
+              <a:t>Generated 2026-06-10 17:37 UTC   |   CONFIDENTIAL</a:t>
             </a:r>
           </a:p>
         </p:txBody>
@@ -3237,9 +3237,9 @@
             <a:r>
               <a:rPr sz="1300" b="1">
                 <a:solidFill>
-                  <a:srgbClr val="2E6DB4"/>
-                </a:solidFill>
-                <a:latin typeface="Arial"/>
+                  <a:srgbClr val="E8590C"/>
+                </a:solidFill>
+                <a:latin typeface="Verdana"/>
               </a:rPr>
               <a:t>EXECUTIVE SUMMARY</a:t>
             </a:r>
@@ -3271,11 +3271,11 @@
             <a:r>
               <a:rPr sz="3000" b="1">
                 <a:solidFill>
-                  <a:srgbClr val="1F2A44"/>
-                </a:solidFill>
-                <a:latin typeface="Georgia"/>
+                  <a:srgbClr val="3A2008"/>
+                </a:solidFill>
+                <a:latin typeface="Verdana"/>
               </a:rPr>
-              <a:t>Sustained revenue growth highlights strong performance in key channels.</a:t>
+              <a:t>Strong revenue growth indicates effective strategies and market positioning.</a:t>
             </a:r>
           </a:p>
         </p:txBody>
@@ -3307,7 +3307,7 @@
                 <a:solidFill>
                   <a:srgbClr val="7A828C"/>
                 </a:solidFill>
-                <a:latin typeface="Arial"/>
+                <a:latin typeface="Verdana"/>
               </a:rPr>
               <a:t>Source: figures verified against the source data.</a:t>
             </a:r>
@@ -3344,7 +3344,7 @@
             <a:r>
               <a:rPr sz="1600" b="1">
                 <a:solidFill>
-                  <a:srgbClr val="2E6DB4"/>
+                  <a:srgbClr val="E8590C"/>
                 </a:solidFill>
               </a:rPr>
               <a:t>●  </a:t>
@@ -3354,9 +3354,9 @@
                 <a:solidFill>
                   <a:srgbClr val="3C4450"/>
                 </a:solidFill>
-                <a:latin typeface="Arial"/>
+                <a:latin typeface="Verdana"/>
               </a:rPr>
-              <a:t>Total revenue increased to $304k in 2026-05, reflecting a growth of +14.7%.</a:t>
+              <a:t>Total revenue increased to $304k, reflecting a growth of +14.7%.</a:t>
             </a:r>
           </a:p>
           <a:p>
@@ -3368,7 +3368,7 @@
             <a:r>
               <a:rPr sz="1600" b="1">
                 <a:solidFill>
-                  <a:srgbClr val="2E6DB4"/>
+                  <a:srgbClr val="E8590C"/>
                 </a:solidFill>
               </a:rPr>
               <a:t>●  </a:t>
@@ -3378,9 +3378,9 @@
                 <a:solidFill>
                   <a:srgbClr val="3C4450"/>
                 </a:solidFill>
-                <a:latin typeface="Arial"/>
+                <a:latin typeface="Verdana"/>
               </a:rPr>
-              <a:t>Organic Search remains the top channel, generating $104k, accounting for 34.1% of total revenue.</a:t>
+              <a:t>Organic Search remains the top channel at $104k, contributing 34.1% of total revenue.</a:t>
             </a:r>
           </a:p>
           <a:p>
@@ -3392,7 +3392,7 @@
             <a:r>
               <a:rPr sz="1600" b="1">
                 <a:solidFill>
-                  <a:srgbClr val="2E6DB4"/>
+                  <a:srgbClr val="E8590C"/>
                 </a:solidFill>
               </a:rPr>
               <a:t>●  </a:t>
@@ -3402,7 +3402,7 @@
                 <a:solidFill>
                   <a:srgbClr val="3C4450"/>
                 </a:solidFill>
-                <a:latin typeface="Arial"/>
+                <a:latin typeface="Verdana"/>
               </a:rPr>
               <a:t>Social channel experienced a decline of -$498 compared to the prior month.</a:t>
             </a:r>
@@ -3452,9 +3452,9 @@
             <a:r>
               <a:rPr sz="1300" b="1">
                 <a:solidFill>
-                  <a:srgbClr val="2E6DB4"/>
-                </a:solidFill>
-                <a:latin typeface="Arial"/>
+                  <a:srgbClr val="E8590C"/>
+                </a:solidFill>
+                <a:latin typeface="Verdana"/>
               </a:rPr>
               <a:t>FINANCIAL PERFORMANCE</a:t>
             </a:r>
@@ -3486,11 +3486,11 @@
             <a:r>
               <a:rPr sz="3000" b="1">
                 <a:solidFill>
-                  <a:srgbClr val="1F2A44"/>
-                </a:solidFill>
-                <a:latin typeface="Georgia"/>
+                  <a:srgbClr val="3A2008"/>
+                </a:solidFill>
+                <a:latin typeface="Verdana"/>
               </a:rPr>
-              <a:t>Total revenue increased to $304k, reflecting a 14.7% rise from $265k.</a:t>
+              <a:t>Total revenue increased to $304k in 2026-05, up $39k from April.</a:t>
             </a:r>
           </a:p>
         </p:txBody>
@@ -3522,7 +3522,7 @@
                 <a:solidFill>
                   <a:srgbClr val="7A828C"/>
                 </a:solidFill>
-                <a:latin typeface="Arial"/>
+                <a:latin typeface="Verdana"/>
               </a:rPr>
               <a:t>Source: performance: Monthly revenue, verified against the data.</a:t>
             </a:r>
@@ -3580,9 +3580,9 @@
                 <a:solidFill>
                   <a:srgbClr val="7A828C"/>
                 </a:solidFill>
-                <a:latin typeface="Arial"/>
+                <a:latin typeface="Verdana"/>
               </a:rPr>
-              <a:t>In May 2026, total revenue reached $304k, up from $265k in April 2026, marking a significant increase of 14.7%. This growth follows a recent trend where revenue has fluctuated, with a peak of $387k in November 2025. The seasonal peak indicates strong performance during the latter part of the year, suggesting potential for future growth during similar periods.</a:t>
+              <a:t>In May 2026, total revenue reached $304k, reflecting a significant increase of $39k or +14.7% compared to April's total of $265k. This growth continues the upward trend observed in recent months, although it remains below the peak month of $387k in November 2025. The data suggests a seasonal pattern, with revenue typically peaking in late fall.</a:t>
             </a:r>
           </a:p>
         </p:txBody>
@@ -3602,7 +3602,7 @@
             <a:avLst/>
           </a:prstGeom>
           <a:solidFill>
-            <a:srgbClr val="1F2A44"/>
+            <a:srgbClr val="3A2008"/>
           </a:solidFill>
           <a:ln>
             <a:noFill/>
@@ -3633,7 +3633,7 @@
                 <a:solidFill>
                   <a:srgbClr val="FFFFFF"/>
                 </a:solidFill>
-                <a:latin typeface="Arial"/>
+                <a:latin typeface="Verdana"/>
               </a:rPr>
               <a:t>KEY TAKEAWAY</a:t>
             </a:r>
@@ -3692,9 +3692,9 @@
                 <a:solidFill>
                   <a:srgbClr val="3C4450"/>
                 </a:solidFill>
-                <a:latin typeface="Arial"/>
+                <a:latin typeface="Verdana"/>
               </a:rPr>
-              <a:t>Sustained growth in revenue indicates potential for continued recovery and strategic investment.</a:t>
+              <a:t>Sustained revenue growth indicates a positive trajectory, but we must aim to exceed seasonal peaks.</a:t>
             </a:r>
           </a:p>
           <a:p>
@@ -3708,9 +3708,9 @@
                 <a:solidFill>
                   <a:srgbClr val="3C4450"/>
                 </a:solidFill>
-                <a:latin typeface="Arial"/>
+                <a:latin typeface="Verdana"/>
               </a:rPr>
-              <a:t>•  May 2026 revenue of $304k exceeds April 2026's $265k by $39k.</a:t>
+              <a:t>•  Revenue in May 2026 is $304k, up from $265k in April.</a:t>
             </a:r>
           </a:p>
           <a:p>
@@ -3724,9 +3724,9 @@
                 <a:solidFill>
                   <a:srgbClr val="3C4450"/>
                 </a:solidFill>
-                <a:latin typeface="Arial"/>
+                <a:latin typeface="Verdana"/>
               </a:rPr>
-              <a:t>•  November 2025 remains the peak month with $387k in revenue.</a:t>
+              <a:t>•  Recent trend shows recovery from lower figures earlier in the year.</a:t>
             </a:r>
           </a:p>
           <a:p>
@@ -3740,9 +3740,9 @@
                 <a:solidFill>
                   <a:srgbClr val="3C4450"/>
                 </a:solidFill>
-                <a:latin typeface="Arial"/>
+                <a:latin typeface="Verdana"/>
               </a:rPr>
-              <a:t>•  Recent months show a recovery trend after lower figures in early 2026.</a:t>
+              <a:t>•  November 2025 remains the peak month at $387k.</a:t>
             </a:r>
           </a:p>
         </p:txBody>
@@ -3790,9 +3790,9 @@
             <a:r>
               <a:rPr sz="1300" b="1">
                 <a:solidFill>
-                  <a:srgbClr val="2E6DB4"/>
-                </a:solidFill>
-                <a:latin typeface="Arial"/>
+                  <a:srgbClr val="E8590C"/>
+                </a:solidFill>
+                <a:latin typeface="Verdana"/>
               </a:rPr>
               <a:t>CHANNEL BREAKDOWN</a:t>
             </a:r>
@@ -3824,9 +3824,9 @@
             <a:r>
               <a:rPr sz="3000" b="1">
                 <a:solidFill>
-                  <a:srgbClr val="1F2A44"/>
-                </a:solidFill>
-                <a:latin typeface="Georgia"/>
+                  <a:srgbClr val="3A2008"/>
+                </a:solidFill>
+                <a:latin typeface="Verdana"/>
               </a:rPr>
               <a:t>Organic Search leads with $104k, driving a $13k increase from April.</a:t>
             </a:r>
@@ -3860,7 +3860,7 @@
                 <a:solidFill>
                   <a:srgbClr val="7A828C"/>
                 </a:solidFill>
-                <a:latin typeface="Arial"/>
+                <a:latin typeface="Verdana"/>
               </a:rPr>
               <a:t>Source: dim_channel: revenue by channel (2026-05), verified against the data.</a:t>
             </a:r>
@@ -3918,9 +3918,9 @@
                 <a:solidFill>
                   <a:srgbClr val="7A828C"/>
                 </a:solidFill>
-                <a:latin typeface="Arial"/>
+                <a:latin typeface="Verdana"/>
               </a:rPr>
-              <a:t>In May 2026, Organic Search generated $104k, representing 34.1% of total revenue and showing the largest growth of $13k compared to April. Email follows with $81k, while Paid Search contributes $77k. The concentration of revenue is heavily skewed towards Organic Search, highlighting its critical role in overall performance.</a:t>
+              <a:t>In May 2026, Organic Search generated $104k, making it the top channel by a significant margin. Email follows with $81k, while Paid Search contributes $77k. Organic Search not only leads but also saw the largest growth, up $13k compared to April, indicating strong performance in this channel.</a:t>
             </a:r>
           </a:p>
         </p:txBody>
@@ -3940,7 +3940,7 @@
             <a:avLst/>
           </a:prstGeom>
           <a:solidFill>
-            <a:srgbClr val="1F2A44"/>
+            <a:srgbClr val="3A2008"/>
           </a:solidFill>
           <a:ln>
             <a:noFill/>
@@ -3971,7 +3971,7 @@
                 <a:solidFill>
                   <a:srgbClr val="FFFFFF"/>
                 </a:solidFill>
-                <a:latin typeface="Arial"/>
+                <a:latin typeface="Verdana"/>
               </a:rPr>
               <a:t>KEY TAKEAWAY</a:t>
             </a:r>
@@ -4030,9 +4030,9 @@
                 <a:solidFill>
                   <a:srgbClr val="3C4450"/>
                 </a:solidFill>
-                <a:latin typeface="Arial"/>
+                <a:latin typeface="Verdana"/>
               </a:rPr>
-              <a:t>Focusing on enhancing Organic Search strategies could significantly boost overall revenue.</a:t>
+              <a:t>Focusing on Organic Search can capitalize on its growth momentum and market leadership.</a:t>
             </a:r>
           </a:p>
           <a:p>
@@ -4046,9 +4046,9 @@
                 <a:solidFill>
                   <a:srgbClr val="3C4450"/>
                 </a:solidFill>
-                <a:latin typeface="Arial"/>
+                <a:latin typeface="Verdana"/>
               </a:rPr>
-              <a:t>•  Organic Search accounts for 34.1% of total revenue.</a:t>
+              <a:t>•  Organic Search: $104k, +$13k from April</a:t>
             </a:r>
           </a:p>
           <a:p>
@@ -4062,9 +4062,9 @@
                 <a:solidFill>
                   <a:srgbClr val="3C4450"/>
                 </a:solidFill>
-                <a:latin typeface="Arial"/>
+                <a:latin typeface="Verdana"/>
               </a:rPr>
-              <a:t>•  Email and Paid Search follow with $81k and $77k respectively.</a:t>
+              <a:t>•  Email: $81k, +$10k from April</a:t>
             </a:r>
           </a:p>
           <a:p>
@@ -4078,9 +4078,9 @@
                 <a:solidFill>
                   <a:srgbClr val="3C4450"/>
                 </a:solidFill>
-                <a:latin typeface="Arial"/>
+                <a:latin typeface="Verdana"/>
               </a:rPr>
-              <a:t>•  Social declined slightly by $498 from the previous month.</a:t>
+              <a:t>•  Paid Search: $77k, +$12k from April</a:t>
             </a:r>
           </a:p>
         </p:txBody>
@@ -4128,9 +4128,9 @@
             <a:r>
               <a:rPr sz="1300" b="1">
                 <a:solidFill>
-                  <a:srgbClr val="2E6DB4"/>
-                </a:solidFill>
-                <a:latin typeface="Arial"/>
+                  <a:srgbClr val="E8590C"/>
+                </a:solidFill>
+                <a:latin typeface="Verdana"/>
               </a:rPr>
               <a:t>RECOMMENDATIONS</a:t>
             </a:r>
@@ -4162,9 +4162,9 @@
             <a:r>
               <a:rPr sz="3000" b="1">
                 <a:solidFill>
-                  <a:srgbClr val="1F2A44"/>
-                </a:solidFill>
-                <a:latin typeface="Georgia"/>
+                  <a:srgbClr val="3A2008"/>
+                </a:solidFill>
+                <a:latin typeface="Verdana"/>
               </a:rPr>
               <a:t>Priorities for the coming month</a:t>
             </a:r>
@@ -4198,7 +4198,7 @@
                 <a:solidFill>
                   <a:srgbClr val="7A828C"/>
                 </a:solidFill>
-                <a:latin typeface="Arial"/>
+                <a:latin typeface="Verdana"/>
               </a:rPr>
               <a:t>Source: figures verified against the source data.</a:t>
             </a:r>
@@ -4237,9 +4237,9 @@
                 <a:solidFill>
                   <a:srgbClr val="3C4450"/>
                 </a:solidFill>
-                <a:latin typeface="Arial"/>
+                <a:latin typeface="Verdana"/>
               </a:rPr>
-              <a:t>1.   Increase investment in Organic Search to capitalize on its $104k contribution and 34.1% share.</a:t>
+              <a:t>1.   Enhance SEO strategies to capitalize on Organic Search's $104k contribution, representing 34.1% of total revenue.</a:t>
             </a:r>
           </a:p>
           <a:p>
@@ -4253,9 +4253,9 @@
                 <a:solidFill>
                   <a:srgbClr val="3C4450"/>
                 </a:solidFill>
-                <a:latin typeface="Arial"/>
+                <a:latin typeface="Verdana"/>
               </a:rPr>
-              <a:t>2.   Develop a targeted strategy to address the Social channel's decline of -$498.</a:t>
+              <a:t>2.   Investigate and address the decline in Social channel performance, which decreased by -$498 compared to prior.</a:t>
             </a:r>
           </a:p>
           <a:p>
@@ -4269,9 +4269,9 @@
                 <a:solidFill>
                   <a:srgbClr val="3C4450"/>
                 </a:solidFill>
-                <a:latin typeface="Arial"/>
+                <a:latin typeface="Verdana"/>
               </a:rPr>
-              <a:t>3.   Analyze customer acquisition costs to optimize overall spending and enhance profitability.</a:t>
+              <a:t>3.   Allocate resources to optimize content marketing efforts that support Organic Search growth and sustain the +14.7% revenue increase.</a:t>
             </a:r>
           </a:p>
           <a:p>
@@ -4285,9 +4285,9 @@
                 <a:solidFill>
                   <a:srgbClr val="3C4450"/>
                 </a:solidFill>
-                <a:latin typeface="Arial"/>
+                <a:latin typeface="Verdana"/>
               </a:rPr>
-              <a:t>4.   Implement a monthly review process to track revenue trends and adjust strategies accordingly.</a:t>
+              <a:t>4.   Monitor monthly revenue trends closely to identify and respond to fluctuations proactively.</a:t>
             </a:r>
           </a:p>
         </p:txBody>

--- a/app/examples/marketing_analytics/report.pptx
+++ b/app/examples/marketing_analytics/report.pptx
@@ -3094,14 +3094,58 @@
       <p:grpSpPr/>
       <p:sp>
         <p:nvSpPr>
-          <p:cNvPr id="2" name="TextBox 1"/>
+          <p:cNvPr id="2" name="Rectangle 1"/>
+          <p:cNvSpPr/>
+          <p:nvPr/>
+        </p:nvSpPr>
+        <p:spPr>
+          <a:xfrm>
+            <a:off x="0" y="0"/>
+            <a:ext cx="12191695" cy="6858000"/>
+          </a:xfrm>
+          <a:prstGeom prst="rect">
+            <a:avLst/>
+          </a:prstGeom>
+          <a:solidFill>
+            <a:srgbClr val="2E0E1E"/>
+          </a:solidFill>
+          <a:ln>
+            <a:noFill/>
+          </a:ln>
+          <a:effectLst/>
+        </p:spPr>
+        <p:style>
+          <a:lnRef idx="1">
+            <a:schemeClr val="accent1"/>
+          </a:lnRef>
+          <a:fillRef idx="3">
+            <a:schemeClr val="accent1"/>
+          </a:fillRef>
+          <a:effectRef idx="2">
+            <a:schemeClr val="accent1"/>
+          </a:effectRef>
+          <a:fontRef idx="minor">
+            <a:schemeClr val="lt1"/>
+          </a:fontRef>
+        </p:style>
+        <p:txBody>
+          <a:bodyPr rtlCol="0" anchor="ctr"/>
+          <a:lstStyle/>
+          <a:p>
+            <a:pPr algn="ctr"/>
+          </a:p>
+        </p:txBody>
+      </p:sp>
+      <p:sp>
+        <p:nvSpPr>
+          <p:cNvPr id="3" name="TextBox 2"/>
           <p:cNvSpPr txBox="1"/>
           <p:nvPr/>
         </p:nvSpPr>
         <p:spPr>
           <a:xfrm>
-            <a:off x="640080" y="2057400"/>
-            <a:ext cx="10881360" cy="1554480"/>
+            <a:off x="777240" y="2148840"/>
+            <a:ext cx="10607040" cy="365760"/>
           </a:xfrm>
           <a:prstGeom prst="rect">
             <a:avLst/>
@@ -3115,27 +3159,71 @@
           <a:lstStyle/>
           <a:p>
             <a:r>
-              <a:rPr sz="4600" b="1">
-                <a:solidFill>
-                  <a:srgbClr val="3A2008"/>
-                </a:solidFill>
-                <a:latin typeface="Verdana"/>
+              <a:rPr sz="1400" b="1">
+                <a:solidFill>
+                  <a:srgbClr val="A61E4D"/>
+                </a:solidFill>
+                <a:latin typeface="Tahoma"/>
               </a:rPr>
-              <a:t>May 2026 Revenue Performance</a:t>
-            </a:r>
-          </a:p>
-        </p:txBody>
-      </p:sp>
-      <p:sp>
-        <p:nvSpPr>
-          <p:cNvPr id="3" name="TextBox 2"/>
+              <a:t>PERFORMANCE REVIEW  ·  2026-05</a:t>
+            </a:r>
+          </a:p>
+        </p:txBody>
+      </p:sp>
+      <p:sp>
+        <p:nvSpPr>
+          <p:cNvPr id="4" name="Rectangle 3"/>
+          <p:cNvSpPr/>
+          <p:nvPr/>
+        </p:nvSpPr>
+        <p:spPr>
+          <a:xfrm>
+            <a:off x="822960" y="2697480"/>
+            <a:ext cx="1554480" cy="76200"/>
+          </a:xfrm>
+          <a:prstGeom prst="rect">
+            <a:avLst/>
+          </a:prstGeom>
+          <a:solidFill>
+            <a:srgbClr val="A61E4D"/>
+          </a:solidFill>
+          <a:ln>
+            <a:noFill/>
+          </a:ln>
+          <a:effectLst/>
+        </p:spPr>
+        <p:style>
+          <a:lnRef idx="1">
+            <a:schemeClr val="accent1"/>
+          </a:lnRef>
+          <a:fillRef idx="3">
+            <a:schemeClr val="accent1"/>
+          </a:fillRef>
+          <a:effectRef idx="2">
+            <a:schemeClr val="accent1"/>
+          </a:effectRef>
+          <a:fontRef idx="minor">
+            <a:schemeClr val="lt1"/>
+          </a:fontRef>
+        </p:style>
+        <p:txBody>
+          <a:bodyPr rtlCol="0" anchor="ctr"/>
+          <a:lstStyle/>
+          <a:p>
+            <a:pPr algn="ctr"/>
+          </a:p>
+        </p:txBody>
+      </p:sp>
+      <p:sp>
+        <p:nvSpPr>
+          <p:cNvPr id="5" name="TextBox 4"/>
           <p:cNvSpPr txBox="1"/>
           <p:nvPr/>
         </p:nvSpPr>
         <p:spPr>
           <a:xfrm>
-            <a:off x="640080" y="3703320"/>
-            <a:ext cx="10881360" cy="548640"/>
+            <a:off x="731520" y="2926080"/>
+            <a:ext cx="10698480" cy="1828800"/>
           </a:xfrm>
           <a:prstGeom prst="rect">
             <a:avLst/>
@@ -3149,27 +3237,27 @@
           <a:lstStyle/>
           <a:p>
             <a:r>
-              <a:rPr sz="1700" b="0">
-                <a:solidFill>
-                  <a:srgbClr val="7A828C"/>
-                </a:solidFill>
-                <a:latin typeface="Verdana"/>
+              <a:rPr sz="4600" b="1">
+                <a:solidFill>
+                  <a:srgbClr val="FFFFFF"/>
+                </a:solidFill>
+                <a:latin typeface="Tahoma"/>
               </a:rPr>
-              <a:t>Period 2026-05  |  source table: ex_marketing_analytics</a:t>
-            </a:r>
-          </a:p>
-        </p:txBody>
-      </p:sp>
-      <p:sp>
-        <p:nvSpPr>
-          <p:cNvPr id="4" name="TextBox 3"/>
+              <a:t>May 2026 Revenue Performance</a:t>
+            </a:r>
+          </a:p>
+        </p:txBody>
+      </p:sp>
+      <p:sp>
+        <p:nvSpPr>
+          <p:cNvPr id="6" name="TextBox 5"/>
           <p:cNvSpPr txBox="1"/>
           <p:nvPr/>
         </p:nvSpPr>
         <p:spPr>
           <a:xfrm>
-            <a:off x="640080" y="4206240"/>
-            <a:ext cx="10881360" cy="457200"/>
+            <a:off x="777240" y="5029200"/>
+            <a:ext cx="10698480" cy="548640"/>
           </a:xfrm>
           <a:prstGeom prst="rect">
             <a:avLst/>
@@ -3183,13 +3271,13 @@
           <a:lstStyle/>
           <a:p>
             <a:r>
-              <a:rPr sz="1100" b="0">
-                <a:solidFill>
-                  <a:srgbClr val="7A828C"/>
-                </a:solidFill>
-                <a:latin typeface="Verdana"/>
+              <a:rPr sz="1700" b="0">
+                <a:solidFill>
+                  <a:srgbClr val="C0C5C9"/>
+                </a:solidFill>
+                <a:latin typeface="Tahoma"/>
               </a:rPr>
-              <a:t>Generated 2026-06-10 17:37 UTC   |   CONFIDENTIAL</a:t>
+              <a:t>Marketing / Web dataset  ·  120 rows</a:t>
             </a:r>
           </a:p>
         </p:txBody>
@@ -3237,9 +3325,9 @@
             <a:r>
               <a:rPr sz="1300" b="1">
                 <a:solidFill>
-                  <a:srgbClr val="E8590C"/>
-                </a:solidFill>
-                <a:latin typeface="Verdana"/>
+                  <a:srgbClr val="A61E4D"/>
+                </a:solidFill>
+                <a:latin typeface="Tahoma"/>
               </a:rPr>
               <a:t>EXECUTIVE SUMMARY</a:t>
             </a:r>
@@ -3271,9 +3359,9 @@
             <a:r>
               <a:rPr sz="3000" b="1">
                 <a:solidFill>
-                  <a:srgbClr val="3A2008"/>
-                </a:solidFill>
-                <a:latin typeface="Verdana"/>
+                  <a:srgbClr val="2E0E1E"/>
+                </a:solidFill>
+                <a:latin typeface="Tahoma"/>
               </a:rPr>
               <a:t>Strong revenue growth indicates effective strategies and market positioning.</a:t>
             </a:r>
@@ -3307,7 +3395,7 @@
                 <a:solidFill>
                   <a:srgbClr val="7A828C"/>
                 </a:solidFill>
-                <a:latin typeface="Verdana"/>
+                <a:latin typeface="Tahoma"/>
               </a:rPr>
               <a:t>Source: figures verified against the source data.</a:t>
             </a:r>
@@ -3344,7 +3432,7 @@
             <a:r>
               <a:rPr sz="1600" b="1">
                 <a:solidFill>
-                  <a:srgbClr val="E8590C"/>
+                  <a:srgbClr val="A61E4D"/>
                 </a:solidFill>
               </a:rPr>
               <a:t>●  </a:t>
@@ -3354,7 +3442,7 @@
                 <a:solidFill>
                   <a:srgbClr val="3C4450"/>
                 </a:solidFill>
-                <a:latin typeface="Verdana"/>
+                <a:latin typeface="Tahoma"/>
               </a:rPr>
               <a:t>Total revenue increased to $304k, reflecting a growth of +14.7%.</a:t>
             </a:r>
@@ -3368,7 +3456,7 @@
             <a:r>
               <a:rPr sz="1600" b="1">
                 <a:solidFill>
-                  <a:srgbClr val="E8590C"/>
+                  <a:srgbClr val="A61E4D"/>
                 </a:solidFill>
               </a:rPr>
               <a:t>●  </a:t>
@@ -3378,7 +3466,7 @@
                 <a:solidFill>
                   <a:srgbClr val="3C4450"/>
                 </a:solidFill>
-                <a:latin typeface="Verdana"/>
+                <a:latin typeface="Tahoma"/>
               </a:rPr>
               <a:t>Organic Search remains the top channel at $104k, contributing 34.1% of total revenue.</a:t>
             </a:r>
@@ -3392,7 +3480,7 @@
             <a:r>
               <a:rPr sz="1600" b="1">
                 <a:solidFill>
-                  <a:srgbClr val="E8590C"/>
+                  <a:srgbClr val="A61E4D"/>
                 </a:solidFill>
               </a:rPr>
               <a:t>●  </a:t>
@@ -3402,7 +3490,7 @@
                 <a:solidFill>
                   <a:srgbClr val="3C4450"/>
                 </a:solidFill>
-                <a:latin typeface="Verdana"/>
+                <a:latin typeface="Tahoma"/>
               </a:rPr>
               <a:t>Social channel experienced a decline of -$498 compared to the prior month.</a:t>
             </a:r>
@@ -3452,9 +3540,9 @@
             <a:r>
               <a:rPr sz="1300" b="1">
                 <a:solidFill>
-                  <a:srgbClr val="E8590C"/>
-                </a:solidFill>
-                <a:latin typeface="Verdana"/>
+                  <a:srgbClr val="A61E4D"/>
+                </a:solidFill>
+                <a:latin typeface="Tahoma"/>
               </a:rPr>
               <a:t>FINANCIAL PERFORMANCE</a:t>
             </a:r>
@@ -3486,9 +3574,9 @@
             <a:r>
               <a:rPr sz="3000" b="1">
                 <a:solidFill>
-                  <a:srgbClr val="3A2008"/>
-                </a:solidFill>
-                <a:latin typeface="Verdana"/>
+                  <a:srgbClr val="2E0E1E"/>
+                </a:solidFill>
+                <a:latin typeface="Tahoma"/>
               </a:rPr>
               <a:t>Total revenue increased to $304k in 2026-05, up $39k from April.</a:t>
             </a:r>
@@ -3522,7 +3610,7 @@
                 <a:solidFill>
                   <a:srgbClr val="7A828C"/>
                 </a:solidFill>
-                <a:latin typeface="Verdana"/>
+                <a:latin typeface="Tahoma"/>
               </a:rPr>
               <a:t>Source: performance: Monthly revenue, verified against the data.</a:t>
             </a:r>
@@ -3580,7 +3668,7 @@
                 <a:solidFill>
                   <a:srgbClr val="7A828C"/>
                 </a:solidFill>
-                <a:latin typeface="Verdana"/>
+                <a:latin typeface="Tahoma"/>
               </a:rPr>
               <a:t>In May 2026, total revenue reached $304k, reflecting a significant increase of $39k or +14.7% compared to April's total of $265k. This growth continues the upward trend observed in recent months, although it remains below the peak month of $387k in November 2025. The data suggests a seasonal pattern, with revenue typically peaking in late fall.</a:t>
             </a:r>
@@ -3602,7 +3690,7 @@
             <a:avLst/>
           </a:prstGeom>
           <a:solidFill>
-            <a:srgbClr val="3A2008"/>
+            <a:srgbClr val="2E0E1E"/>
           </a:solidFill>
           <a:ln>
             <a:noFill/>
@@ -3633,7 +3721,7 @@
                 <a:solidFill>
                   <a:srgbClr val="FFFFFF"/>
                 </a:solidFill>
-                <a:latin typeface="Verdana"/>
+                <a:latin typeface="Tahoma"/>
               </a:rPr>
               <a:t>KEY TAKEAWAY</a:t>
             </a:r>
@@ -3692,7 +3780,7 @@
                 <a:solidFill>
                   <a:srgbClr val="3C4450"/>
                 </a:solidFill>
-                <a:latin typeface="Verdana"/>
+                <a:latin typeface="Tahoma"/>
               </a:rPr>
               <a:t>Sustained revenue growth indicates a positive trajectory, but we must aim to exceed seasonal peaks.</a:t>
             </a:r>
@@ -3708,7 +3796,7 @@
                 <a:solidFill>
                   <a:srgbClr val="3C4450"/>
                 </a:solidFill>
-                <a:latin typeface="Verdana"/>
+                <a:latin typeface="Tahoma"/>
               </a:rPr>
               <a:t>•  Revenue in May 2026 is $304k, up from $265k in April.</a:t>
             </a:r>
@@ -3724,7 +3812,7 @@
                 <a:solidFill>
                   <a:srgbClr val="3C4450"/>
                 </a:solidFill>
-                <a:latin typeface="Verdana"/>
+                <a:latin typeface="Tahoma"/>
               </a:rPr>
               <a:t>•  Recent trend shows recovery from lower figures earlier in the year.</a:t>
             </a:r>
@@ -3740,7 +3828,7 @@
                 <a:solidFill>
                   <a:srgbClr val="3C4450"/>
                 </a:solidFill>
-                <a:latin typeface="Verdana"/>
+                <a:latin typeface="Tahoma"/>
               </a:rPr>
               <a:t>•  November 2025 remains the peak month at $387k.</a:t>
             </a:r>
@@ -3790,9 +3878,9 @@
             <a:r>
               <a:rPr sz="1300" b="1">
                 <a:solidFill>
-                  <a:srgbClr val="E8590C"/>
-                </a:solidFill>
-                <a:latin typeface="Verdana"/>
+                  <a:srgbClr val="A61E4D"/>
+                </a:solidFill>
+                <a:latin typeface="Tahoma"/>
               </a:rPr>
               <a:t>CHANNEL BREAKDOWN</a:t>
             </a:r>
@@ -3824,9 +3912,9 @@
             <a:r>
               <a:rPr sz="3000" b="1">
                 <a:solidFill>
-                  <a:srgbClr val="3A2008"/>
-                </a:solidFill>
-                <a:latin typeface="Verdana"/>
+                  <a:srgbClr val="2E0E1E"/>
+                </a:solidFill>
+                <a:latin typeface="Tahoma"/>
               </a:rPr>
               <a:t>Organic Search leads with $104k, driving a $13k increase from April.</a:t>
             </a:r>
@@ -3860,7 +3948,7 @@
                 <a:solidFill>
                   <a:srgbClr val="7A828C"/>
                 </a:solidFill>
-                <a:latin typeface="Verdana"/>
+                <a:latin typeface="Tahoma"/>
               </a:rPr>
               <a:t>Source: dim_channel: revenue by channel (2026-05), verified against the data.</a:t>
             </a:r>
@@ -3883,8 +3971,8 @@
         </p:blipFill>
         <p:spPr>
           <a:xfrm>
-            <a:off x="457200" y="1783080"/>
-            <a:ext cx="6949440" cy="3563815"/>
+            <a:off x="3264408" y="1645920"/>
+            <a:ext cx="5669280" cy="2907323"/>
           </a:xfrm>
           <a:prstGeom prst="rect">
             <a:avLst/>
@@ -3899,8 +3987,8 @@
         </p:nvSpPr>
         <p:spPr>
           <a:xfrm>
-            <a:off x="457200" y="5486400"/>
-            <a:ext cx="6949440" cy="868680"/>
+            <a:off x="457200" y="4572000"/>
+            <a:ext cx="11277295" cy="411480"/>
           </a:xfrm>
           <a:prstGeom prst="rect">
             <a:avLst/>
@@ -3913,14 +4001,15 @@
           </a:bodyPr>
           <a:lstStyle/>
           <a:p>
-            <a:r>
-              <a:rPr sz="1100" b="0">
-                <a:solidFill>
-                  <a:srgbClr val="7A828C"/>
-                </a:solidFill>
-                <a:latin typeface="Verdana"/>
+            <a:pPr algn="ctr"/>
+            <a:r>
+              <a:rPr sz="1300" b="1">
+                <a:solidFill>
+                  <a:srgbClr val="2E0E1E"/>
+                </a:solidFill>
+                <a:latin typeface="Tahoma"/>
               </a:rPr>
-              <a:t>In May 2026, Organic Search generated $104k, making it the top channel by a significant margin. Email follows with $81k, while Paid Search contributes $77k. Organic Search not only leads but also saw the largest growth, up $13k compared to April, indicating strong performance in this channel.</a:t>
+              <a:t>Focusing on Organic Search can capitalize on its growth momentum and market leadership.</a:t>
             </a:r>
           </a:p>
         </p:txBody>
@@ -3933,14 +4022,14 @@
         </p:nvSpPr>
         <p:spPr>
           <a:xfrm>
-            <a:off x="7772400" y="1783080"/>
-            <a:ext cx="3931920" cy="457200"/>
+            <a:off x="457200" y="5074920"/>
+            <a:ext cx="3454298" cy="50800"/>
           </a:xfrm>
           <a:prstGeom prst="rect">
             <a:avLst/>
           </a:prstGeom>
           <a:solidFill>
-            <a:srgbClr val="3A2008"/>
+            <a:srgbClr val="A61E4D"/>
           </a:solidFill>
           <a:ln>
             <a:noFill/>
@@ -3962,43 +4051,100 @@
           </a:fontRef>
         </p:style>
         <p:txBody>
-          <a:bodyPr rtlCol="0" anchor="ctr" lIns="201168" tIns="18288" bIns="18288"/>
+          <a:bodyPr rtlCol="0" anchor="ctr"/>
           <a:lstStyle/>
           <a:p>
             <a:pPr algn="ctr"/>
-            <a:r>
-              <a:rPr sz="1200" b="1">
-                <a:solidFill>
-                  <a:srgbClr val="FFFFFF"/>
-                </a:solidFill>
-                <a:latin typeface="Verdana"/>
+          </a:p>
+        </p:txBody>
+      </p:sp>
+      <p:sp>
+        <p:nvSpPr>
+          <p:cNvPr id="8" name="TextBox 7"/>
+          <p:cNvSpPr txBox="1"/>
+          <p:nvPr/>
+        </p:nvSpPr>
+        <p:spPr>
+          <a:xfrm>
+            <a:off x="457200" y="5184648"/>
+            <a:ext cx="3454298" cy="777240"/>
+          </a:xfrm>
+          <a:prstGeom prst="rect">
+            <a:avLst/>
+          </a:prstGeom>
+          <a:noFill/>
+        </p:spPr>
+        <p:txBody>
+          <a:bodyPr wrap="square">
+            <a:spAutoFit/>
+          </a:bodyPr>
+          <a:lstStyle/>
+          <a:p>
+            <a:r>
+              <a:rPr sz="3000" b="1">
+                <a:solidFill>
+                  <a:srgbClr val="2E0E1E"/>
+                </a:solidFill>
+                <a:latin typeface="Tahoma"/>
               </a:rPr>
-              <a:t>KEY TAKEAWAY</a:t>
-            </a:r>
-          </a:p>
-        </p:txBody>
-      </p:sp>
-      <p:sp>
-        <p:nvSpPr>
-          <p:cNvPr id="8" name="Rectangle 7"/>
+              <a:t>$104k</a:t>
+            </a:r>
+          </a:p>
+        </p:txBody>
+      </p:sp>
+      <p:sp>
+        <p:nvSpPr>
+          <p:cNvPr id="9" name="TextBox 8"/>
+          <p:cNvSpPr txBox="1"/>
+          <p:nvPr/>
+        </p:nvSpPr>
+        <p:spPr>
+          <a:xfrm>
+            <a:off x="457200" y="5943600"/>
+            <a:ext cx="3454298" cy="502920"/>
+          </a:xfrm>
+          <a:prstGeom prst="rect">
+            <a:avLst/>
+          </a:prstGeom>
+          <a:noFill/>
+        </p:spPr>
+        <p:txBody>
+          <a:bodyPr wrap="square">
+            <a:spAutoFit/>
+          </a:bodyPr>
+          <a:lstStyle/>
+          <a:p>
+            <a:r>
+              <a:rPr sz="1200" b="0">
+                <a:solidFill>
+                  <a:srgbClr val="7A828C"/>
+                </a:solidFill>
+                <a:latin typeface="Tahoma"/>
+              </a:rPr>
+              <a:t>Organic Search</a:t>
+            </a:r>
+          </a:p>
+        </p:txBody>
+      </p:sp>
+      <p:sp>
+        <p:nvSpPr>
+          <p:cNvPr id="10" name="Rectangle 9"/>
           <p:cNvSpPr/>
           <p:nvPr/>
         </p:nvSpPr>
         <p:spPr>
           <a:xfrm>
-            <a:off x="7772400" y="2240280"/>
-            <a:ext cx="3931920" cy="3200400"/>
+            <a:off x="4368698" y="5074920"/>
+            <a:ext cx="3454298" cy="50800"/>
           </a:xfrm>
           <a:prstGeom prst="rect">
             <a:avLst/>
           </a:prstGeom>
           <a:solidFill>
-            <a:srgbClr val="E6E8EB"/>
+            <a:srgbClr val="A61E4D"/>
           </a:solidFill>
-          <a:ln w="9525">
-            <a:solidFill>
-              <a:srgbClr val="C0C5C9"/>
-            </a:solidFill>
+          <a:ln>
+            <a:noFill/>
           </a:ln>
           <a:effectLst/>
         </p:spPr>
@@ -4017,70 +4163,189 @@
           </a:fontRef>
         </p:style>
         <p:txBody>
-          <a:bodyPr rtlCol="0" anchor="t" wrap="square" lIns="219456" rIns="219456" tIns="237744"/>
-          <a:lstStyle/>
-          <a:p>
-            <a:pPr algn="l">
-              <a:spcAft>
-                <a:spcPts val="1600"/>
-              </a:spcAft>
-            </a:pPr>
-            <a:r>
-              <a:rPr sz="1300" b="0">
-                <a:solidFill>
-                  <a:srgbClr val="3C4450"/>
-                </a:solidFill>
-                <a:latin typeface="Verdana"/>
+          <a:bodyPr rtlCol="0" anchor="ctr"/>
+          <a:lstStyle/>
+          <a:p>
+            <a:pPr algn="ctr"/>
+          </a:p>
+        </p:txBody>
+      </p:sp>
+      <p:sp>
+        <p:nvSpPr>
+          <p:cNvPr id="11" name="TextBox 10"/>
+          <p:cNvSpPr txBox="1"/>
+          <p:nvPr/>
+        </p:nvSpPr>
+        <p:spPr>
+          <a:xfrm>
+            <a:off x="4368698" y="5184648"/>
+            <a:ext cx="3454298" cy="777240"/>
+          </a:xfrm>
+          <a:prstGeom prst="rect">
+            <a:avLst/>
+          </a:prstGeom>
+          <a:noFill/>
+        </p:spPr>
+        <p:txBody>
+          <a:bodyPr wrap="square">
+            <a:spAutoFit/>
+          </a:bodyPr>
+          <a:lstStyle/>
+          <a:p>
+            <a:r>
+              <a:rPr sz="3000" b="1">
+                <a:solidFill>
+                  <a:srgbClr val="2E0E1E"/>
+                </a:solidFill>
+                <a:latin typeface="Tahoma"/>
               </a:rPr>
-              <a:t>Focusing on Organic Search can capitalize on its growth momentum and market leadership.</a:t>
-            </a:r>
-          </a:p>
-          <a:p>
-            <a:pPr algn="l">
-              <a:spcAft>
-                <a:spcPts val="700"/>
-              </a:spcAft>
-            </a:pPr>
-            <a:r>
-              <a:rPr sz="1100" b="0">
-                <a:solidFill>
-                  <a:srgbClr val="3C4450"/>
-                </a:solidFill>
-                <a:latin typeface="Verdana"/>
+              <a:t>$81k</a:t>
+            </a:r>
+          </a:p>
+        </p:txBody>
+      </p:sp>
+      <p:sp>
+        <p:nvSpPr>
+          <p:cNvPr id="12" name="TextBox 11"/>
+          <p:cNvSpPr txBox="1"/>
+          <p:nvPr/>
+        </p:nvSpPr>
+        <p:spPr>
+          <a:xfrm>
+            <a:off x="4368698" y="5943600"/>
+            <a:ext cx="3454298" cy="502920"/>
+          </a:xfrm>
+          <a:prstGeom prst="rect">
+            <a:avLst/>
+          </a:prstGeom>
+          <a:noFill/>
+        </p:spPr>
+        <p:txBody>
+          <a:bodyPr wrap="square">
+            <a:spAutoFit/>
+          </a:bodyPr>
+          <a:lstStyle/>
+          <a:p>
+            <a:r>
+              <a:rPr sz="1200" b="0">
+                <a:solidFill>
+                  <a:srgbClr val="7A828C"/>
+                </a:solidFill>
+                <a:latin typeface="Tahoma"/>
               </a:rPr>
-              <a:t>•  Organic Search: $104k, +$13k from April</a:t>
-            </a:r>
-          </a:p>
-          <a:p>
-            <a:pPr algn="l">
-              <a:spcAft>
-                <a:spcPts val="700"/>
-              </a:spcAft>
-            </a:pPr>
-            <a:r>
-              <a:rPr sz="1100" b="0">
-                <a:solidFill>
-                  <a:srgbClr val="3C4450"/>
-                </a:solidFill>
-                <a:latin typeface="Verdana"/>
+              <a:t>Email</a:t>
+            </a:r>
+          </a:p>
+        </p:txBody>
+      </p:sp>
+      <p:sp>
+        <p:nvSpPr>
+          <p:cNvPr id="13" name="Rectangle 12"/>
+          <p:cNvSpPr/>
+          <p:nvPr/>
+        </p:nvSpPr>
+        <p:spPr>
+          <a:xfrm>
+            <a:off x="8280196" y="5074920"/>
+            <a:ext cx="3454298" cy="50800"/>
+          </a:xfrm>
+          <a:prstGeom prst="rect">
+            <a:avLst/>
+          </a:prstGeom>
+          <a:solidFill>
+            <a:srgbClr val="A61E4D"/>
+          </a:solidFill>
+          <a:ln>
+            <a:noFill/>
+          </a:ln>
+          <a:effectLst/>
+        </p:spPr>
+        <p:style>
+          <a:lnRef idx="1">
+            <a:schemeClr val="accent1"/>
+          </a:lnRef>
+          <a:fillRef idx="3">
+            <a:schemeClr val="accent1"/>
+          </a:fillRef>
+          <a:effectRef idx="2">
+            <a:schemeClr val="accent1"/>
+          </a:effectRef>
+          <a:fontRef idx="minor">
+            <a:schemeClr val="lt1"/>
+          </a:fontRef>
+        </p:style>
+        <p:txBody>
+          <a:bodyPr rtlCol="0" anchor="ctr"/>
+          <a:lstStyle/>
+          <a:p>
+            <a:pPr algn="ctr"/>
+          </a:p>
+        </p:txBody>
+      </p:sp>
+      <p:sp>
+        <p:nvSpPr>
+          <p:cNvPr id="14" name="TextBox 13"/>
+          <p:cNvSpPr txBox="1"/>
+          <p:nvPr/>
+        </p:nvSpPr>
+        <p:spPr>
+          <a:xfrm>
+            <a:off x="8280196" y="5184648"/>
+            <a:ext cx="3454298" cy="777240"/>
+          </a:xfrm>
+          <a:prstGeom prst="rect">
+            <a:avLst/>
+          </a:prstGeom>
+          <a:noFill/>
+        </p:spPr>
+        <p:txBody>
+          <a:bodyPr wrap="square">
+            <a:spAutoFit/>
+          </a:bodyPr>
+          <a:lstStyle/>
+          <a:p>
+            <a:r>
+              <a:rPr sz="3000" b="1">
+                <a:solidFill>
+                  <a:srgbClr val="2E0E1E"/>
+                </a:solidFill>
+                <a:latin typeface="Tahoma"/>
               </a:rPr>
-              <a:t>•  Email: $81k, +$10k from April</a:t>
-            </a:r>
-          </a:p>
-          <a:p>
-            <a:pPr algn="l">
-              <a:spcAft>
-                <a:spcPts val="700"/>
-              </a:spcAft>
-            </a:pPr>
-            <a:r>
-              <a:rPr sz="1100" b="0">
-                <a:solidFill>
-                  <a:srgbClr val="3C4450"/>
-                </a:solidFill>
-                <a:latin typeface="Verdana"/>
+              <a:t>$77k</a:t>
+            </a:r>
+          </a:p>
+        </p:txBody>
+      </p:sp>
+      <p:sp>
+        <p:nvSpPr>
+          <p:cNvPr id="15" name="TextBox 14"/>
+          <p:cNvSpPr txBox="1"/>
+          <p:nvPr/>
+        </p:nvSpPr>
+        <p:spPr>
+          <a:xfrm>
+            <a:off x="8280196" y="5943600"/>
+            <a:ext cx="3454298" cy="502920"/>
+          </a:xfrm>
+          <a:prstGeom prst="rect">
+            <a:avLst/>
+          </a:prstGeom>
+          <a:noFill/>
+        </p:spPr>
+        <p:txBody>
+          <a:bodyPr wrap="square">
+            <a:spAutoFit/>
+          </a:bodyPr>
+          <a:lstStyle/>
+          <a:p>
+            <a:r>
+              <a:rPr sz="1200" b="0">
+                <a:solidFill>
+                  <a:srgbClr val="7A828C"/>
+                </a:solidFill>
+                <a:latin typeface="Tahoma"/>
               </a:rPr>
-              <a:t>•  Paid Search: $77k, +$12k from April</a:t>
+              <a:t>Paid Search</a:t>
             </a:r>
           </a:p>
         </p:txBody>
@@ -4128,9 +4393,9 @@
             <a:r>
               <a:rPr sz="1300" b="1">
                 <a:solidFill>
-                  <a:srgbClr val="E8590C"/>
-                </a:solidFill>
-                <a:latin typeface="Verdana"/>
+                  <a:srgbClr val="A61E4D"/>
+                </a:solidFill>
+                <a:latin typeface="Tahoma"/>
               </a:rPr>
               <a:t>RECOMMENDATIONS</a:t>
             </a:r>
@@ -4162,9 +4427,9 @@
             <a:r>
               <a:rPr sz="3000" b="1">
                 <a:solidFill>
-                  <a:srgbClr val="3A2008"/>
-                </a:solidFill>
-                <a:latin typeface="Verdana"/>
+                  <a:srgbClr val="2E0E1E"/>
+                </a:solidFill>
+                <a:latin typeface="Tahoma"/>
               </a:rPr>
               <a:t>Priorities for the coming month</a:t>
             </a:r>
@@ -4198,7 +4463,7 @@
                 <a:solidFill>
                   <a:srgbClr val="7A828C"/>
                 </a:solidFill>
-                <a:latin typeface="Verdana"/>
+                <a:latin typeface="Tahoma"/>
               </a:rPr>
               <a:t>Source: figures verified against the source data.</a:t>
             </a:r>
@@ -4237,7 +4502,7 @@
                 <a:solidFill>
                   <a:srgbClr val="3C4450"/>
                 </a:solidFill>
-                <a:latin typeface="Verdana"/>
+                <a:latin typeface="Tahoma"/>
               </a:rPr>
               <a:t>1.   Enhance SEO strategies to capitalize on Organic Search's $104k contribution, representing 34.1% of total revenue.</a:t>
             </a:r>
@@ -4253,7 +4518,7 @@
                 <a:solidFill>
                   <a:srgbClr val="3C4450"/>
                 </a:solidFill>
-                <a:latin typeface="Verdana"/>
+                <a:latin typeface="Tahoma"/>
               </a:rPr>
               <a:t>2.   Investigate and address the decline in Social channel performance, which decreased by -$498 compared to prior.</a:t>
             </a:r>
@@ -4269,7 +4534,7 @@
                 <a:solidFill>
                   <a:srgbClr val="3C4450"/>
                 </a:solidFill>
-                <a:latin typeface="Verdana"/>
+                <a:latin typeface="Tahoma"/>
               </a:rPr>
               <a:t>3.   Allocate resources to optimize content marketing efforts that support Organic Search growth and sustain the +14.7% revenue increase.</a:t>
             </a:r>
@@ -4285,7 +4550,7 @@
                 <a:solidFill>
                   <a:srgbClr val="3C4450"/>
                 </a:solidFill>
-                <a:latin typeface="Verdana"/>
+                <a:latin typeface="Tahoma"/>
               </a:rPr>
               <a:t>4.   Monitor monthly revenue trends closely to identify and respond to fluctuations proactively.</a:t>
             </a:r>

--- a/app/examples/marketing_analytics/report.pptx
+++ b/app/examples/marketing_analytics/report.pptx
@@ -3094,20 +3094,54 @@
       <p:grpSpPr/>
       <p:sp>
         <p:nvSpPr>
-          <p:cNvPr id="2" name="Rectangle 1"/>
+          <p:cNvPr id="2" name="TextBox 1"/>
+          <p:cNvSpPr txBox="1"/>
+          <p:nvPr/>
+        </p:nvSpPr>
+        <p:spPr>
+          <a:xfrm>
+            <a:off x="777240" y="777240"/>
+            <a:ext cx="10607040" cy="1828800"/>
+          </a:xfrm>
+          <a:prstGeom prst="rect">
+            <a:avLst/>
+          </a:prstGeom>
+          <a:noFill/>
+        </p:spPr>
+        <p:txBody>
+          <a:bodyPr wrap="square">
+            <a:spAutoFit/>
+          </a:bodyPr>
+          <a:lstStyle/>
+          <a:p>
+            <a:r>
+              <a:rPr sz="4600" b="1">
+                <a:solidFill>
+                  <a:srgbClr val="2E0E1E"/>
+                </a:solidFill>
+                <a:latin typeface="Tahoma"/>
+              </a:rPr>
+              <a:t>May 2026 Revenue Performance</a:t>
+            </a:r>
+          </a:p>
+        </p:txBody>
+      </p:sp>
+      <p:sp>
+        <p:nvSpPr>
+          <p:cNvPr id="3" name="Rectangle 2"/>
           <p:cNvSpPr/>
           <p:nvPr/>
         </p:nvSpPr>
         <p:spPr>
           <a:xfrm>
-            <a:off x="0" y="0"/>
-            <a:ext cx="12191695" cy="6858000"/>
+            <a:off x="822960" y="2743200"/>
+            <a:ext cx="1554480" cy="76200"/>
           </a:xfrm>
           <a:prstGeom prst="rect">
             <a:avLst/>
           </a:prstGeom>
           <a:solidFill>
-            <a:srgbClr val="2E0E1E"/>
+            <a:srgbClr val="A61E4D"/>
           </a:solidFill>
           <a:ln>
             <a:noFill/>
@@ -3138,14 +3172,14 @@
       </p:sp>
       <p:sp>
         <p:nvSpPr>
-          <p:cNvPr id="3" name="TextBox 2"/>
+          <p:cNvPr id="4" name="TextBox 3"/>
           <p:cNvSpPr txBox="1"/>
           <p:nvPr/>
         </p:nvSpPr>
         <p:spPr>
           <a:xfrm>
-            <a:off x="777240" y="2148840"/>
-            <a:ext cx="10607040" cy="365760"/>
+            <a:off x="777240" y="2971800"/>
+            <a:ext cx="10607040" cy="548640"/>
           </a:xfrm>
           <a:prstGeom prst="rect">
             <a:avLst/>
@@ -3159,125 +3193,13 @@
           <a:lstStyle/>
           <a:p>
             <a:r>
-              <a:rPr sz="1400" b="1">
-                <a:solidFill>
-                  <a:srgbClr val="A61E4D"/>
+              <a:rPr sz="1700" b="0">
+                <a:solidFill>
+                  <a:srgbClr val="7A828C"/>
                 </a:solidFill>
                 <a:latin typeface="Tahoma"/>
               </a:rPr>
-              <a:t>PERFORMANCE REVIEW  ·  2026-05</a:t>
-            </a:r>
-          </a:p>
-        </p:txBody>
-      </p:sp>
-      <p:sp>
-        <p:nvSpPr>
-          <p:cNvPr id="4" name="Rectangle 3"/>
-          <p:cNvSpPr/>
-          <p:nvPr/>
-        </p:nvSpPr>
-        <p:spPr>
-          <a:xfrm>
-            <a:off x="822960" y="2697480"/>
-            <a:ext cx="1554480" cy="76200"/>
-          </a:xfrm>
-          <a:prstGeom prst="rect">
-            <a:avLst/>
-          </a:prstGeom>
-          <a:solidFill>
-            <a:srgbClr val="A61E4D"/>
-          </a:solidFill>
-          <a:ln>
-            <a:noFill/>
-          </a:ln>
-          <a:effectLst/>
-        </p:spPr>
-        <p:style>
-          <a:lnRef idx="1">
-            <a:schemeClr val="accent1"/>
-          </a:lnRef>
-          <a:fillRef idx="3">
-            <a:schemeClr val="accent1"/>
-          </a:fillRef>
-          <a:effectRef idx="2">
-            <a:schemeClr val="accent1"/>
-          </a:effectRef>
-          <a:fontRef idx="minor">
-            <a:schemeClr val="lt1"/>
-          </a:fontRef>
-        </p:style>
-        <p:txBody>
-          <a:bodyPr rtlCol="0" anchor="ctr"/>
-          <a:lstStyle/>
-          <a:p>
-            <a:pPr algn="ctr"/>
-          </a:p>
-        </p:txBody>
-      </p:sp>
-      <p:sp>
-        <p:nvSpPr>
-          <p:cNvPr id="5" name="TextBox 4"/>
-          <p:cNvSpPr txBox="1"/>
-          <p:nvPr/>
-        </p:nvSpPr>
-        <p:spPr>
-          <a:xfrm>
-            <a:off x="731520" y="2926080"/>
-            <a:ext cx="10698480" cy="1828800"/>
-          </a:xfrm>
-          <a:prstGeom prst="rect">
-            <a:avLst/>
-          </a:prstGeom>
-          <a:noFill/>
-        </p:spPr>
-        <p:txBody>
-          <a:bodyPr wrap="square">
-            <a:spAutoFit/>
-          </a:bodyPr>
-          <a:lstStyle/>
-          <a:p>
-            <a:r>
-              <a:rPr sz="4600" b="1">
-                <a:solidFill>
-                  <a:srgbClr val="FFFFFF"/>
-                </a:solidFill>
-                <a:latin typeface="Tahoma"/>
-              </a:rPr>
-              <a:t>May 2026 Revenue Performance</a:t>
-            </a:r>
-          </a:p>
-        </p:txBody>
-      </p:sp>
-      <p:sp>
-        <p:nvSpPr>
-          <p:cNvPr id="6" name="TextBox 5"/>
-          <p:cNvSpPr txBox="1"/>
-          <p:nvPr/>
-        </p:nvSpPr>
-        <p:spPr>
-          <a:xfrm>
-            <a:off x="777240" y="5029200"/>
-            <a:ext cx="10698480" cy="548640"/>
-          </a:xfrm>
-          <a:prstGeom prst="rect">
-            <a:avLst/>
-          </a:prstGeom>
-          <a:noFill/>
-        </p:spPr>
-        <p:txBody>
-          <a:bodyPr wrap="square">
-            <a:spAutoFit/>
-          </a:bodyPr>
-          <a:lstStyle/>
-          <a:p>
-            <a:r>
-              <a:rPr sz="1700" b="0">
-                <a:solidFill>
-                  <a:srgbClr val="C0C5C9"/>
-                </a:solidFill>
-                <a:latin typeface="Tahoma"/>
-              </a:rPr>
-              <a:t>Marketing / Web dataset  ·  120 rows</a:t>
+              <a:t>Marketing / Web dataset  ·  3,650 rows</a:t>
             </a:r>
           </a:p>
         </p:txBody>
@@ -3363,7 +3285,7 @@
                 </a:solidFill>
                 <a:latin typeface="Tahoma"/>
               </a:rPr>
-              <a:t>Strong revenue growth indicates effective strategies and market positioning.</a:t>
+              <a:t>Sustained growth in revenue highlights effective strategies and channel performance.</a:t>
             </a:r>
           </a:p>
         </p:txBody>
@@ -3444,7 +3366,7 @@
                 </a:solidFill>
                 <a:latin typeface="Tahoma"/>
               </a:rPr>
-              <a:t>Total revenue increased to $304k, reflecting a growth of +14.7%.</a:t>
+              <a:t>Total revenue reached $303k in 2026-05, reflecting a positive trend.</a:t>
             </a:r>
           </a:p>
           <a:p>
@@ -3468,7 +3390,7 @@
                 </a:solidFill>
                 <a:latin typeface="Tahoma"/>
               </a:rPr>
-              <a:t>Organic Search remains the top channel at $104k, contributing 34.1% of total revenue.</a:t>
+              <a:t>Organic Search generated $103k, accounting for 33.9% of total revenue.</a:t>
             </a:r>
           </a:p>
           <a:p>
@@ -3492,7 +3414,31 @@
                 </a:solidFill>
                 <a:latin typeface="Tahoma"/>
               </a:rPr>
-              <a:t>Social channel experienced a decline of -$498 compared to the prior month.</a:t>
+              <a:t>Revenue increased by $13k compared to $290k in 2026-04, indicating growth.</a:t>
+            </a:r>
+          </a:p>
+          <a:p>
+            <a:pPr>
+              <a:spcAft>
+                <a:spcPts val="1600"/>
+              </a:spcAft>
+            </a:pPr>
+            <a:r>
+              <a:rPr sz="1600" b="1">
+                <a:solidFill>
+                  <a:srgbClr val="A61E4D"/>
+                </a:solidFill>
+              </a:rPr>
+              <a:t>●  </a:t>
+            </a:r>
+            <a:r>
+              <a:rPr sz="1600" b="0">
+                <a:solidFill>
+                  <a:srgbClr val="3C4450"/>
+                </a:solidFill>
+                <a:latin typeface="Tahoma"/>
+              </a:rPr>
+              <a:t>Social channel experienced a decline of -$6, signaling a need for strategic review.</a:t>
             </a:r>
           </a:p>
         </p:txBody>
@@ -3578,7 +3524,7 @@
                 </a:solidFill>
                 <a:latin typeface="Tahoma"/>
               </a:rPr>
-              <a:t>Total revenue increased to $304k in 2026-05, up $39k from April.</a:t>
+              <a:t>Total revenue increased to $303k in 2026-05, up $13k from April.</a:t>
             </a:r>
           </a:p>
         </p:txBody>
@@ -3670,7 +3616,7 @@
                 </a:solidFill>
                 <a:latin typeface="Tahoma"/>
               </a:rPr>
-              <a:t>In May 2026, total revenue reached $304k, reflecting a significant increase of $39k or +14.7% compared to April's total of $265k. This growth continues the upward trend observed in recent months, although it remains below the peak month of $387k in November 2025. The data suggests a seasonal pattern, with revenue typically peaking in late fall.</a:t>
+              <a:t>In May 2026, total revenue reached $303k, reflecting a 4.7% increase from April's $290k. This growth marks a positive trend following a period of fluctuation, with the peak month recorded at $413k in December 2025. Seasonal patterns suggest that revenue typically peaks in December, indicating potential for future growth during that period.</a:t>
             </a:r>
           </a:p>
         </p:txBody>
@@ -3782,7 +3728,7 @@
                 </a:solidFill>
                 <a:latin typeface="Tahoma"/>
               </a:rPr>
-              <a:t>Sustained revenue growth indicates a positive trajectory, but we must aim to exceed seasonal peaks.</a:t>
+              <a:t>Sustained growth in revenue suggests improving market conditions and potential for future peaks.</a:t>
             </a:r>
           </a:p>
           <a:p>
@@ -3798,7 +3744,7 @@
                 </a:solidFill>
                 <a:latin typeface="Tahoma"/>
               </a:rPr>
-              <a:t>•  Revenue in May 2026 is $304k, up from $265k in April.</a:t>
+              <a:t>•  May 2026 revenue of $303k is above the average of $253k over the last year.</a:t>
             </a:r>
           </a:p>
           <a:p>
@@ -3814,7 +3760,7 @@
                 </a:solidFill>
                 <a:latin typeface="Tahoma"/>
               </a:rPr>
-              <a:t>•  Recent trend shows recovery from lower figures earlier in the year.</a:t>
+              <a:t>•  December 2025 was the peak month with $413k in revenue.</a:t>
             </a:r>
           </a:p>
           <a:p>
@@ -3830,7 +3776,7 @@
                 </a:solidFill>
                 <a:latin typeface="Tahoma"/>
               </a:rPr>
-              <a:t>•  November 2025 remains the peak month at $387k.</a:t>
+              <a:t>•  Recent months show a recovery trend from lower figures earlier in 2026.</a:t>
             </a:r>
           </a:p>
         </p:txBody>
@@ -3916,7 +3862,7 @@
                 </a:solidFill>
                 <a:latin typeface="Tahoma"/>
               </a:rPr>
-              <a:t>Organic Search leads with $104k, driving a $13k increase from April.</a:t>
+              <a:t>Organic Search leads with $103k, dominating 33.9% of total revenue.</a:t>
             </a:r>
           </a:p>
         </p:txBody>
@@ -3971,8 +3917,8 @@
         </p:blipFill>
         <p:spPr>
           <a:xfrm>
-            <a:off x="3264408" y="1645920"/>
-            <a:ext cx="5669280" cy="2907323"/>
+            <a:off x="914400" y="1554480"/>
+            <a:ext cx="10332720" cy="3061547"/>
           </a:xfrm>
           <a:prstGeom prst="rect">
             <a:avLst/>
@@ -3981,48 +3927,13 @@
       </p:pic>
       <p:sp>
         <p:nvSpPr>
-          <p:cNvPr id="6" name="TextBox 5"/>
-          <p:cNvSpPr txBox="1"/>
-          <p:nvPr/>
-        </p:nvSpPr>
-        <p:spPr>
-          <a:xfrm>
-            <a:off x="457200" y="4572000"/>
-            <a:ext cx="11277295" cy="411480"/>
-          </a:xfrm>
-          <a:prstGeom prst="rect">
-            <a:avLst/>
-          </a:prstGeom>
-          <a:noFill/>
-        </p:spPr>
-        <p:txBody>
-          <a:bodyPr wrap="square">
-            <a:spAutoFit/>
-          </a:bodyPr>
-          <a:lstStyle/>
-          <a:p>
-            <a:pPr algn="ctr"/>
-            <a:r>
-              <a:rPr sz="1300" b="1">
-                <a:solidFill>
-                  <a:srgbClr val="2E0E1E"/>
-                </a:solidFill>
-                <a:latin typeface="Tahoma"/>
-              </a:rPr>
-              <a:t>Focusing on Organic Search can capitalize on its growth momentum and market leadership.</a:t>
-            </a:r>
-          </a:p>
-        </p:txBody>
-      </p:sp>
-      <p:sp>
-        <p:nvSpPr>
-          <p:cNvPr id="7" name="Rectangle 6"/>
+          <p:cNvPr id="6" name="Rectangle 5"/>
           <p:cNvSpPr/>
           <p:nvPr/>
         </p:nvSpPr>
         <p:spPr>
           <a:xfrm>
-            <a:off x="457200" y="5074920"/>
+            <a:off x="457200" y="4754880"/>
             <a:ext cx="3454298" cy="50800"/>
           </a:xfrm>
           <a:prstGeom prst="rect">
@@ -4060,14 +3971,14 @@
       </p:sp>
       <p:sp>
         <p:nvSpPr>
-          <p:cNvPr id="8" name="TextBox 7"/>
+          <p:cNvPr id="7" name="TextBox 6"/>
           <p:cNvSpPr txBox="1"/>
           <p:nvPr/>
         </p:nvSpPr>
         <p:spPr>
           <a:xfrm>
-            <a:off x="457200" y="5184648"/>
-            <a:ext cx="3454298" cy="777240"/>
+            <a:off x="457200" y="4846320"/>
+            <a:ext cx="3454298" cy="640080"/>
           </a:xfrm>
           <a:prstGeom prst="rect">
             <a:avLst/>
@@ -4081,27 +3992,27 @@
           <a:lstStyle/>
           <a:p>
             <a:r>
-              <a:rPr sz="3000" b="1">
+              <a:rPr sz="2700" b="1">
                 <a:solidFill>
                   <a:srgbClr val="2E0E1E"/>
                 </a:solidFill>
                 <a:latin typeface="Tahoma"/>
               </a:rPr>
-              <a:t>$104k</a:t>
-            </a:r>
-          </a:p>
-        </p:txBody>
-      </p:sp>
-      <p:sp>
-        <p:nvSpPr>
-          <p:cNvPr id="9" name="TextBox 8"/>
+              <a:t>$103k</a:t>
+            </a:r>
+          </a:p>
+        </p:txBody>
+      </p:sp>
+      <p:sp>
+        <p:nvSpPr>
+          <p:cNvPr id="8" name="TextBox 7"/>
           <p:cNvSpPr txBox="1"/>
           <p:nvPr/>
         </p:nvSpPr>
         <p:spPr>
           <a:xfrm>
-            <a:off x="457200" y="5943600"/>
-            <a:ext cx="3454298" cy="502920"/>
+            <a:off x="457200" y="5468112"/>
+            <a:ext cx="3454298" cy="1417320"/>
           </a:xfrm>
           <a:prstGeom prst="rect">
             <a:avLst/>
@@ -4115,26 +4026,26 @@
           <a:lstStyle/>
           <a:p>
             <a:r>
-              <a:rPr sz="1200" b="0">
+              <a:rPr sz="1100" b="0">
                 <a:solidFill>
                   <a:srgbClr val="7A828C"/>
                 </a:solidFill>
                 <a:latin typeface="Tahoma"/>
               </a:rPr>
-              <a:t>Organic Search</a:t>
-            </a:r>
-          </a:p>
-        </p:txBody>
-      </p:sp>
-      <p:sp>
-        <p:nvSpPr>
-          <p:cNvPr id="10" name="Rectangle 9"/>
+              <a:t>Organic Search is the largest channel with $103k revenue.</a:t>
+            </a:r>
+          </a:p>
+        </p:txBody>
+      </p:sp>
+      <p:sp>
+        <p:nvSpPr>
+          <p:cNvPr id="9" name="Rectangle 8"/>
           <p:cNvSpPr/>
           <p:nvPr/>
         </p:nvSpPr>
         <p:spPr>
           <a:xfrm>
-            <a:off x="4368698" y="5074920"/>
+            <a:off x="4368698" y="4754880"/>
             <a:ext cx="3454298" cy="50800"/>
           </a:xfrm>
           <a:prstGeom prst="rect">
@@ -4172,14 +4083,14 @@
       </p:sp>
       <p:sp>
         <p:nvSpPr>
-          <p:cNvPr id="11" name="TextBox 10"/>
+          <p:cNvPr id="10" name="TextBox 9"/>
           <p:cNvSpPr txBox="1"/>
           <p:nvPr/>
         </p:nvSpPr>
         <p:spPr>
           <a:xfrm>
-            <a:off x="4368698" y="5184648"/>
-            <a:ext cx="3454298" cy="777240"/>
+            <a:off x="4368698" y="4846320"/>
+            <a:ext cx="3454298" cy="640080"/>
           </a:xfrm>
           <a:prstGeom prst="rect">
             <a:avLst/>
@@ -4193,27 +4104,27 @@
           <a:lstStyle/>
           <a:p>
             <a:r>
-              <a:rPr sz="3000" b="1">
+              <a:rPr sz="2700" b="1">
                 <a:solidFill>
                   <a:srgbClr val="2E0E1E"/>
                 </a:solidFill>
                 <a:latin typeface="Tahoma"/>
               </a:rPr>
-              <a:t>$81k</a:t>
-            </a:r>
-          </a:p>
-        </p:txBody>
-      </p:sp>
-      <p:sp>
-        <p:nvSpPr>
-          <p:cNvPr id="12" name="TextBox 11"/>
+              <a:t>$83k</a:t>
+            </a:r>
+          </a:p>
+        </p:txBody>
+      </p:sp>
+      <p:sp>
+        <p:nvSpPr>
+          <p:cNvPr id="11" name="TextBox 10"/>
           <p:cNvSpPr txBox="1"/>
           <p:nvPr/>
         </p:nvSpPr>
         <p:spPr>
           <a:xfrm>
-            <a:off x="4368698" y="5943600"/>
-            <a:ext cx="3454298" cy="502920"/>
+            <a:off x="4368698" y="5468112"/>
+            <a:ext cx="3454298" cy="1417320"/>
           </a:xfrm>
           <a:prstGeom prst="rect">
             <a:avLst/>
@@ -4227,26 +4138,26 @@
           <a:lstStyle/>
           <a:p>
             <a:r>
-              <a:rPr sz="1200" b="0">
+              <a:rPr sz="1100" b="0">
                 <a:solidFill>
                   <a:srgbClr val="7A828C"/>
                 </a:solidFill>
                 <a:latin typeface="Tahoma"/>
               </a:rPr>
-              <a:t>Email</a:t>
-            </a:r>
-          </a:p>
-        </p:txBody>
-      </p:sp>
-      <p:sp>
-        <p:nvSpPr>
-          <p:cNvPr id="13" name="Rectangle 12"/>
+              <a:t>Email is the biggest mover, increasing by +$6k to $83k.</a:t>
+            </a:r>
+          </a:p>
+        </p:txBody>
+      </p:sp>
+      <p:sp>
+        <p:nvSpPr>
+          <p:cNvPr id="12" name="Rectangle 11"/>
           <p:cNvSpPr/>
           <p:nvPr/>
         </p:nvSpPr>
         <p:spPr>
           <a:xfrm>
-            <a:off x="8280196" y="5074920"/>
+            <a:off x="8280196" y="4754880"/>
             <a:ext cx="3454298" cy="50800"/>
           </a:xfrm>
           <a:prstGeom prst="rect">
@@ -4284,14 +4195,14 @@
       </p:sp>
       <p:sp>
         <p:nvSpPr>
-          <p:cNvPr id="14" name="TextBox 13"/>
+          <p:cNvPr id="13" name="TextBox 12"/>
           <p:cNvSpPr txBox="1"/>
           <p:nvPr/>
         </p:nvSpPr>
         <p:spPr>
           <a:xfrm>
-            <a:off x="8280196" y="5184648"/>
-            <a:ext cx="3454298" cy="777240"/>
+            <a:off x="8280196" y="4846320"/>
+            <a:ext cx="3454298" cy="640080"/>
           </a:xfrm>
           <a:prstGeom prst="rect">
             <a:avLst/>
@@ -4305,27 +4216,27 @@
           <a:lstStyle/>
           <a:p>
             <a:r>
-              <a:rPr sz="3000" b="1">
+              <a:rPr sz="2700" b="1">
                 <a:solidFill>
                   <a:srgbClr val="2E0E1E"/>
                 </a:solidFill>
                 <a:latin typeface="Tahoma"/>
               </a:rPr>
-              <a:t>$77k</a:t>
-            </a:r>
-          </a:p>
-        </p:txBody>
-      </p:sp>
-      <p:sp>
-        <p:nvSpPr>
-          <p:cNvPr id="15" name="TextBox 14"/>
+              <a:t>$74k</a:t>
+            </a:r>
+          </a:p>
+        </p:txBody>
+      </p:sp>
+      <p:sp>
+        <p:nvSpPr>
+          <p:cNvPr id="14" name="TextBox 13"/>
           <p:cNvSpPr txBox="1"/>
           <p:nvPr/>
         </p:nvSpPr>
         <p:spPr>
           <a:xfrm>
-            <a:off x="8280196" y="5943600"/>
-            <a:ext cx="3454298" cy="502920"/>
+            <a:off x="8280196" y="5468112"/>
+            <a:ext cx="3454298" cy="1417320"/>
           </a:xfrm>
           <a:prstGeom prst="rect">
             <a:avLst/>
@@ -4339,13 +4250,13 @@
           <a:lstStyle/>
           <a:p>
             <a:r>
-              <a:rPr sz="1200" b="0">
+              <a:rPr sz="1100" b="0">
                 <a:solidFill>
                   <a:srgbClr val="7A828C"/>
                 </a:solidFill>
                 <a:latin typeface="Tahoma"/>
               </a:rPr>
-              <a:t>Paid Search</a:t>
+              <a:t>Social is the only channel to decline, down by -$6.</a:t>
             </a:r>
           </a:p>
         </p:txBody>
@@ -4504,7 +4415,7 @@
                 </a:solidFill>
                 <a:latin typeface="Tahoma"/>
               </a:rPr>
-              <a:t>1.   Enhance SEO strategies to capitalize on Organic Search's $104k contribution, representing 34.1% of total revenue.</a:t>
+              <a:t>1.   Enhance investment in Organic Search to capitalize on its $103k contribution and 33.9% share.</a:t>
             </a:r>
           </a:p>
           <a:p>
@@ -4520,7 +4431,7 @@
                 </a:solidFill>
                 <a:latin typeface="Tahoma"/>
               </a:rPr>
-              <a:t>2.   Investigate and address the decline in Social channel performance, which decreased by -$498 compared to prior.</a:t>
+              <a:t>2.   Address the decline in Social by reallocating resources or optimizing content strategy to recover the -$6 loss.</a:t>
             </a:r>
           </a:p>
           <a:p>
@@ -4536,7 +4447,7 @@
                 </a:solidFill>
                 <a:latin typeface="Tahoma"/>
               </a:rPr>
-              <a:t>3.   Allocate resources to optimize content marketing efforts that support Organic Search growth and sustain the +14.7% revenue increase.</a:t>
+              <a:t>3.   Monitor revenue trends closely to sustain the growth momentum of +4.7% from $290k to $303k.</a:t>
             </a:r>
           </a:p>
           <a:p>
@@ -4552,7 +4463,7 @@
                 </a:solidFill>
                 <a:latin typeface="Tahoma"/>
               </a:rPr>
-              <a:t>4.   Monitor monthly revenue trends closely to identify and respond to fluctuations proactively.</a:t>
+              <a:t>4.   Implement targeted marketing campaigns to further boost underperforming channels and maximize overall revenue.</a:t>
             </a:r>
           </a:p>
         </p:txBody>

--- a/app/examples/marketing_analytics/report.pptx
+++ b/app/examples/marketing_analytics/report.pptx
@@ -3094,54 +3094,20 @@
       <p:grpSpPr/>
       <p:sp>
         <p:nvSpPr>
-          <p:cNvPr id="2" name="TextBox 1"/>
-          <p:cNvSpPr txBox="1"/>
-          <p:nvPr/>
-        </p:nvSpPr>
-        <p:spPr>
-          <a:xfrm>
-            <a:off x="777240" y="777240"/>
-            <a:ext cx="10607040" cy="1828800"/>
-          </a:xfrm>
-          <a:prstGeom prst="rect">
-            <a:avLst/>
-          </a:prstGeom>
-          <a:noFill/>
-        </p:spPr>
-        <p:txBody>
-          <a:bodyPr wrap="square">
-            <a:spAutoFit/>
-          </a:bodyPr>
-          <a:lstStyle/>
-          <a:p>
-            <a:r>
-              <a:rPr sz="4600" b="1">
-                <a:solidFill>
-                  <a:srgbClr val="2E0E1E"/>
-                </a:solidFill>
-                <a:latin typeface="Tahoma"/>
-              </a:rPr>
-              <a:t>May 2026 Revenue Performance</a:t>
-            </a:r>
-          </a:p>
-        </p:txBody>
-      </p:sp>
-      <p:sp>
-        <p:nvSpPr>
-          <p:cNvPr id="3" name="Rectangle 2"/>
+          <p:cNvPr id="2" name="Rectangle 1"/>
           <p:cNvSpPr/>
           <p:nvPr/>
         </p:nvSpPr>
         <p:spPr>
           <a:xfrm>
-            <a:off x="822960" y="2743200"/>
-            <a:ext cx="1554480" cy="76200"/>
+            <a:off x="0" y="0"/>
+            <a:ext cx="12191695" cy="6858000"/>
           </a:xfrm>
           <a:prstGeom prst="rect">
             <a:avLst/>
           </a:prstGeom>
           <a:solidFill>
-            <a:srgbClr val="A61E4D"/>
+            <a:srgbClr val="14503B"/>
           </a:solidFill>
           <a:ln>
             <a:noFill/>
@@ -3172,14 +3138,14 @@
       </p:sp>
       <p:sp>
         <p:nvSpPr>
-          <p:cNvPr id="4" name="TextBox 3"/>
+          <p:cNvPr id="3" name="TextBox 2"/>
           <p:cNvSpPr txBox="1"/>
           <p:nvPr/>
         </p:nvSpPr>
         <p:spPr>
           <a:xfrm>
-            <a:off x="777240" y="2971800"/>
-            <a:ext cx="10607040" cy="548640"/>
+            <a:off x="777240" y="777240"/>
+            <a:ext cx="10607040" cy="1828800"/>
           </a:xfrm>
           <a:prstGeom prst="rect">
             <a:avLst/>
@@ -3193,9 +3159,87 @@
           <a:lstStyle/>
           <a:p>
             <a:r>
+              <a:rPr sz="4600" b="1">
+                <a:solidFill>
+                  <a:srgbClr val="FFFFFF"/>
+                </a:solidFill>
+                <a:latin typeface="Tahoma"/>
+              </a:rPr>
+              <a:t>May 2026 Revenue Insights</a:t>
+            </a:r>
+          </a:p>
+        </p:txBody>
+      </p:sp>
+      <p:sp>
+        <p:nvSpPr>
+          <p:cNvPr id="4" name="Rectangle 3"/>
+          <p:cNvSpPr/>
+          <p:nvPr/>
+        </p:nvSpPr>
+        <p:spPr>
+          <a:xfrm>
+            <a:off x="822960" y="2743200"/>
+            <a:ext cx="1554480" cy="76200"/>
+          </a:xfrm>
+          <a:prstGeom prst="rect">
+            <a:avLst/>
+          </a:prstGeom>
+          <a:solidFill>
+            <a:srgbClr val="1E7D55"/>
+          </a:solidFill>
+          <a:ln>
+            <a:noFill/>
+          </a:ln>
+          <a:effectLst/>
+        </p:spPr>
+        <p:style>
+          <a:lnRef idx="1">
+            <a:schemeClr val="accent1"/>
+          </a:lnRef>
+          <a:fillRef idx="3">
+            <a:schemeClr val="accent1"/>
+          </a:fillRef>
+          <a:effectRef idx="2">
+            <a:schemeClr val="accent1"/>
+          </a:effectRef>
+          <a:fontRef idx="minor">
+            <a:schemeClr val="lt1"/>
+          </a:fontRef>
+        </p:style>
+        <p:txBody>
+          <a:bodyPr rtlCol="0" anchor="ctr"/>
+          <a:lstStyle/>
+          <a:p>
+            <a:pPr algn="ctr"/>
+          </a:p>
+        </p:txBody>
+      </p:sp>
+      <p:sp>
+        <p:nvSpPr>
+          <p:cNvPr id="5" name="TextBox 4"/>
+          <p:cNvSpPr txBox="1"/>
+          <p:nvPr/>
+        </p:nvSpPr>
+        <p:spPr>
+          <a:xfrm>
+            <a:off x="777240" y="2971800"/>
+            <a:ext cx="10607040" cy="548640"/>
+          </a:xfrm>
+          <a:prstGeom prst="rect">
+            <a:avLst/>
+          </a:prstGeom>
+          <a:noFill/>
+        </p:spPr>
+        <p:txBody>
+          <a:bodyPr wrap="square">
+            <a:spAutoFit/>
+          </a:bodyPr>
+          <a:lstStyle/>
+          <a:p>
+            <a:r>
               <a:rPr sz="1700" b="0">
                 <a:solidFill>
-                  <a:srgbClr val="7A828C"/>
+                  <a:srgbClr val="C0C5C9"/>
                 </a:solidFill>
                 <a:latin typeface="Tahoma"/>
               </a:rPr>
@@ -3247,7 +3291,7 @@
             <a:r>
               <a:rPr sz="1300" b="1">
                 <a:solidFill>
-                  <a:srgbClr val="A61E4D"/>
+                  <a:srgbClr val="1E7D55"/>
                 </a:solidFill>
                 <a:latin typeface="Tahoma"/>
               </a:rPr>
@@ -3281,11 +3325,11 @@
             <a:r>
               <a:rPr sz="3000" b="1">
                 <a:solidFill>
-                  <a:srgbClr val="2E0E1E"/>
+                  <a:srgbClr val="14503B"/>
                 </a:solidFill>
                 <a:latin typeface="Tahoma"/>
               </a:rPr>
-              <a:t>Sustained growth in revenue highlights effective strategies and channel performance.</a:t>
+              <a:t>Organic Search drives growth, while Social declines impact overall performance.</a:t>
             </a:r>
           </a:p>
         </p:txBody>
@@ -3354,7 +3398,7 @@
             <a:r>
               <a:rPr sz="1600" b="1">
                 <a:solidFill>
-                  <a:srgbClr val="A61E4D"/>
+                  <a:srgbClr val="1E7D55"/>
                 </a:solidFill>
               </a:rPr>
               <a:t>●  </a:t>
@@ -3366,7 +3410,7 @@
                 </a:solidFill>
                 <a:latin typeface="Tahoma"/>
               </a:rPr>
-              <a:t>Total revenue reached $303k in 2026-05, reflecting a positive trend.</a:t>
+              <a:t>Total revenue increased to $303k, reflecting a positive trend.</a:t>
             </a:r>
           </a:p>
           <a:p>
@@ -3378,7 +3422,7 @@
             <a:r>
               <a:rPr sz="1600" b="1">
                 <a:solidFill>
-                  <a:srgbClr val="A61E4D"/>
+                  <a:srgbClr val="1E7D55"/>
                 </a:solidFill>
               </a:rPr>
               <a:t>●  </a:t>
@@ -3390,7 +3434,7 @@
                 </a:solidFill>
                 <a:latin typeface="Tahoma"/>
               </a:rPr>
-              <a:t>Organic Search generated $103k, accounting for 33.9% of total revenue.</a:t>
+              <a:t>Organic Search generated $103k, contributing 33.9% of total revenue.</a:t>
             </a:r>
           </a:p>
           <a:p>
@@ -3402,7 +3446,7 @@
             <a:r>
               <a:rPr sz="1600" b="1">
                 <a:solidFill>
-                  <a:srgbClr val="A61E4D"/>
+                  <a:srgbClr val="1E7D55"/>
                 </a:solidFill>
               </a:rPr>
               <a:t>●  </a:t>
@@ -3414,7 +3458,7 @@
                 </a:solidFill>
                 <a:latin typeface="Tahoma"/>
               </a:rPr>
-              <a:t>Revenue increased by $13k compared to $290k in 2026-04, indicating growth.</a:t>
+              <a:t>Total revenue grew by +4.7% compared to April 2026.</a:t>
             </a:r>
           </a:p>
           <a:p>
@@ -3426,7 +3470,7 @@
             <a:r>
               <a:rPr sz="1600" b="1">
                 <a:solidFill>
-                  <a:srgbClr val="A61E4D"/>
+                  <a:srgbClr val="1E7D55"/>
                 </a:solidFill>
               </a:rPr>
               <a:t>●  </a:t>
@@ -3438,7 +3482,7 @@
                 </a:solidFill>
                 <a:latin typeface="Tahoma"/>
               </a:rPr>
-              <a:t>Social channel experienced a decline of -$6, signaling a need for strategic review.</a:t>
+              <a:t>Social channel experienced a decline of -$6 compared to the prior month.</a:t>
             </a:r>
           </a:p>
         </p:txBody>
@@ -3486,7 +3530,7 @@
             <a:r>
               <a:rPr sz="1300" b="1">
                 <a:solidFill>
-                  <a:srgbClr val="A61E4D"/>
+                  <a:srgbClr val="1E7D55"/>
                 </a:solidFill>
                 <a:latin typeface="Tahoma"/>
               </a:rPr>
@@ -3520,7 +3564,7 @@
             <a:r>
               <a:rPr sz="3000" b="1">
                 <a:solidFill>
-                  <a:srgbClr val="2E0E1E"/>
+                  <a:srgbClr val="14503B"/>
                 </a:solidFill>
                 <a:latin typeface="Tahoma"/>
               </a:rPr>
@@ -3579,8 +3623,8 @@
         </p:blipFill>
         <p:spPr>
           <a:xfrm>
-            <a:off x="457200" y="1783080"/>
-            <a:ext cx="6949440" cy="3563815"/>
+            <a:off x="914400" y="1554480"/>
+            <a:ext cx="10332720" cy="3061547"/>
           </a:xfrm>
           <a:prstGeom prst="rect">
             <a:avLst/>
@@ -3589,54 +3633,20 @@
       </p:pic>
       <p:sp>
         <p:nvSpPr>
-          <p:cNvPr id="6" name="TextBox 5"/>
-          <p:cNvSpPr txBox="1"/>
-          <p:nvPr/>
-        </p:nvSpPr>
-        <p:spPr>
-          <a:xfrm>
-            <a:off x="457200" y="5486400"/>
-            <a:ext cx="6949440" cy="868680"/>
-          </a:xfrm>
-          <a:prstGeom prst="rect">
-            <a:avLst/>
-          </a:prstGeom>
-          <a:noFill/>
-        </p:spPr>
-        <p:txBody>
-          <a:bodyPr wrap="square">
-            <a:spAutoFit/>
-          </a:bodyPr>
-          <a:lstStyle/>
-          <a:p>
-            <a:r>
-              <a:rPr sz="1100" b="0">
-                <a:solidFill>
-                  <a:srgbClr val="7A828C"/>
-                </a:solidFill>
-                <a:latin typeface="Tahoma"/>
-              </a:rPr>
-              <a:t>In May 2026, total revenue reached $303k, reflecting a 4.7% increase from April's $290k. This growth marks a positive trend following a period of fluctuation, with the peak month recorded at $413k in December 2025. Seasonal patterns suggest that revenue typically peaks in December, indicating potential for future growth during that period.</a:t>
-            </a:r>
-          </a:p>
-        </p:txBody>
-      </p:sp>
-      <p:sp>
-        <p:nvSpPr>
-          <p:cNvPr id="7" name="Rectangle 6"/>
+          <p:cNvPr id="6" name="Rectangle 5"/>
           <p:cNvSpPr/>
           <p:nvPr/>
         </p:nvSpPr>
         <p:spPr>
           <a:xfrm>
-            <a:off x="7772400" y="1783080"/>
-            <a:ext cx="3931920" cy="457200"/>
+            <a:off x="457200" y="4754880"/>
+            <a:ext cx="2510713" cy="50800"/>
           </a:xfrm>
           <a:prstGeom prst="rect">
             <a:avLst/>
           </a:prstGeom>
           <a:solidFill>
-            <a:srgbClr val="2E0E1E"/>
+            <a:srgbClr val="1E7D55"/>
           </a:solidFill>
           <a:ln>
             <a:noFill/>
@@ -3658,43 +3668,100 @@
           </a:fontRef>
         </p:style>
         <p:txBody>
-          <a:bodyPr rtlCol="0" anchor="ctr" lIns="201168" tIns="18288" bIns="18288"/>
+          <a:bodyPr rtlCol="0" anchor="ctr"/>
           <a:lstStyle/>
           <a:p>
             <a:pPr algn="ctr"/>
-            <a:r>
-              <a:rPr sz="1200" b="1">
-                <a:solidFill>
-                  <a:srgbClr val="FFFFFF"/>
+          </a:p>
+        </p:txBody>
+      </p:sp>
+      <p:sp>
+        <p:nvSpPr>
+          <p:cNvPr id="7" name="TextBox 6"/>
+          <p:cNvSpPr txBox="1"/>
+          <p:nvPr/>
+        </p:nvSpPr>
+        <p:spPr>
+          <a:xfrm>
+            <a:off x="457200" y="4846320"/>
+            <a:ext cx="2510713" cy="640080"/>
+          </a:xfrm>
+          <a:prstGeom prst="rect">
+            <a:avLst/>
+          </a:prstGeom>
+          <a:noFill/>
+        </p:spPr>
+        <p:txBody>
+          <a:bodyPr wrap="square">
+            <a:spAutoFit/>
+          </a:bodyPr>
+          <a:lstStyle/>
+          <a:p>
+            <a:r>
+              <a:rPr sz="2600" b="1">
+                <a:solidFill>
+                  <a:srgbClr val="14503B"/>
                 </a:solidFill>
                 <a:latin typeface="Tahoma"/>
               </a:rPr>
-              <a:t>KEY TAKEAWAY</a:t>
-            </a:r>
-          </a:p>
-        </p:txBody>
-      </p:sp>
-      <p:sp>
-        <p:nvSpPr>
-          <p:cNvPr id="8" name="Rectangle 7"/>
+              <a:t>$303k</a:t>
+            </a:r>
+          </a:p>
+        </p:txBody>
+      </p:sp>
+      <p:sp>
+        <p:nvSpPr>
+          <p:cNvPr id="8" name="TextBox 7"/>
+          <p:cNvSpPr txBox="1"/>
+          <p:nvPr/>
+        </p:nvSpPr>
+        <p:spPr>
+          <a:xfrm>
+            <a:off x="457200" y="5468112"/>
+            <a:ext cx="2510713" cy="1417320"/>
+          </a:xfrm>
+          <a:prstGeom prst="rect">
+            <a:avLst/>
+          </a:prstGeom>
+          <a:noFill/>
+        </p:spPr>
+        <p:txBody>
+          <a:bodyPr wrap="square">
+            <a:spAutoFit/>
+          </a:bodyPr>
+          <a:lstStyle/>
+          <a:p>
+            <a:r>
+              <a:rPr sz="1100" b="0">
+                <a:solidFill>
+                  <a:srgbClr val="7A828C"/>
+                </a:solidFill>
+                <a:latin typeface="Tahoma"/>
+              </a:rPr>
+              <a:t>Latest month (2026-05)</a:t>
+            </a:r>
+          </a:p>
+        </p:txBody>
+      </p:sp>
+      <p:sp>
+        <p:nvSpPr>
+          <p:cNvPr id="9" name="Rectangle 8"/>
           <p:cNvSpPr/>
           <p:nvPr/>
         </p:nvSpPr>
         <p:spPr>
           <a:xfrm>
-            <a:off x="7772400" y="2240280"/>
-            <a:ext cx="3931920" cy="3200400"/>
+            <a:off x="3379393" y="4754880"/>
+            <a:ext cx="2510713" cy="50800"/>
           </a:xfrm>
           <a:prstGeom prst="rect">
             <a:avLst/>
           </a:prstGeom>
           <a:solidFill>
-            <a:srgbClr val="E6E8EB"/>
+            <a:srgbClr val="1E7D55"/>
           </a:solidFill>
-          <a:ln w="9525">
-            <a:solidFill>
-              <a:srgbClr val="C0C5C9"/>
-            </a:solidFill>
+          <a:ln>
+            <a:noFill/>
           </a:ln>
           <a:effectLst/>
         </p:spPr>
@@ -3713,70 +3780,301 @@
           </a:fontRef>
         </p:style>
         <p:txBody>
-          <a:bodyPr rtlCol="0" anchor="t" wrap="square" lIns="219456" rIns="219456" tIns="237744"/>
-          <a:lstStyle/>
-          <a:p>
-            <a:pPr algn="l">
-              <a:spcAft>
-                <a:spcPts val="1600"/>
-              </a:spcAft>
-            </a:pPr>
-            <a:r>
-              <a:rPr sz="1300" b="0">
-                <a:solidFill>
-                  <a:srgbClr val="3C4450"/>
+          <a:bodyPr rtlCol="0" anchor="ctr"/>
+          <a:lstStyle/>
+          <a:p>
+            <a:pPr algn="ctr"/>
+          </a:p>
+        </p:txBody>
+      </p:sp>
+      <p:sp>
+        <p:nvSpPr>
+          <p:cNvPr id="10" name="TextBox 9"/>
+          <p:cNvSpPr txBox="1"/>
+          <p:nvPr/>
+        </p:nvSpPr>
+        <p:spPr>
+          <a:xfrm>
+            <a:off x="3379393" y="4846320"/>
+            <a:ext cx="2510713" cy="640080"/>
+          </a:xfrm>
+          <a:prstGeom prst="rect">
+            <a:avLst/>
+          </a:prstGeom>
+          <a:noFill/>
+        </p:spPr>
+        <p:txBody>
+          <a:bodyPr wrap="square">
+            <a:spAutoFit/>
+          </a:bodyPr>
+          <a:lstStyle/>
+          <a:p>
+            <a:r>
+              <a:rPr sz="2600" b="1">
+                <a:solidFill>
+                  <a:srgbClr val="14503B"/>
                 </a:solidFill>
                 <a:latin typeface="Tahoma"/>
               </a:rPr>
-              <a:t>Sustained growth in revenue suggests improving market conditions and potential for future peaks.</a:t>
-            </a:r>
-          </a:p>
-          <a:p>
-            <a:pPr algn="l">
-              <a:spcAft>
-                <a:spcPts val="700"/>
-              </a:spcAft>
-            </a:pPr>
+              <a:t>$413k</a:t>
+            </a:r>
+          </a:p>
+        </p:txBody>
+      </p:sp>
+      <p:sp>
+        <p:nvSpPr>
+          <p:cNvPr id="11" name="TextBox 10"/>
+          <p:cNvSpPr txBox="1"/>
+          <p:nvPr/>
+        </p:nvSpPr>
+        <p:spPr>
+          <a:xfrm>
+            <a:off x="3379393" y="5468112"/>
+            <a:ext cx="2510713" cy="1417320"/>
+          </a:xfrm>
+          <a:prstGeom prst="rect">
+            <a:avLst/>
+          </a:prstGeom>
+          <a:noFill/>
+        </p:spPr>
+        <p:txBody>
+          <a:bodyPr wrap="square">
+            <a:spAutoFit/>
+          </a:bodyPr>
+          <a:lstStyle/>
+          <a:p>
             <a:r>
               <a:rPr sz="1100" b="0">
                 <a:solidFill>
-                  <a:srgbClr val="3C4450"/>
+                  <a:srgbClr val="7A828C"/>
                 </a:solidFill>
                 <a:latin typeface="Tahoma"/>
               </a:rPr>
-              <a:t>•  May 2026 revenue of $303k is above the average of $253k over the last year.</a:t>
-            </a:r>
-          </a:p>
-          <a:p>
-            <a:pPr algn="l">
-              <a:spcAft>
-                <a:spcPts val="700"/>
-              </a:spcAft>
-            </a:pPr>
-            <a:r>
-              <a:rPr sz="1100" b="0">
-                <a:solidFill>
-                  <a:srgbClr val="3C4450"/>
+              <a:t>Peak month (2025-12)</a:t>
+            </a:r>
+          </a:p>
+        </p:txBody>
+      </p:sp>
+      <p:sp>
+        <p:nvSpPr>
+          <p:cNvPr id="12" name="Rectangle 11"/>
+          <p:cNvSpPr/>
+          <p:nvPr/>
+        </p:nvSpPr>
+        <p:spPr>
+          <a:xfrm>
+            <a:off x="6301587" y="4754880"/>
+            <a:ext cx="2510713" cy="50800"/>
+          </a:xfrm>
+          <a:prstGeom prst="rect">
+            <a:avLst/>
+          </a:prstGeom>
+          <a:solidFill>
+            <a:srgbClr val="1E7D55"/>
+          </a:solidFill>
+          <a:ln>
+            <a:noFill/>
+          </a:ln>
+          <a:effectLst/>
+        </p:spPr>
+        <p:style>
+          <a:lnRef idx="1">
+            <a:schemeClr val="accent1"/>
+          </a:lnRef>
+          <a:fillRef idx="3">
+            <a:schemeClr val="accent1"/>
+          </a:fillRef>
+          <a:effectRef idx="2">
+            <a:schemeClr val="accent1"/>
+          </a:effectRef>
+          <a:fontRef idx="minor">
+            <a:schemeClr val="lt1"/>
+          </a:fontRef>
+        </p:style>
+        <p:txBody>
+          <a:bodyPr rtlCol="0" anchor="ctr"/>
+          <a:lstStyle/>
+          <a:p>
+            <a:pPr algn="ctr"/>
+          </a:p>
+        </p:txBody>
+      </p:sp>
+      <p:sp>
+        <p:nvSpPr>
+          <p:cNvPr id="13" name="TextBox 12"/>
+          <p:cNvSpPr txBox="1"/>
+          <p:nvPr/>
+        </p:nvSpPr>
+        <p:spPr>
+          <a:xfrm>
+            <a:off x="6301587" y="4846320"/>
+            <a:ext cx="2510713" cy="640080"/>
+          </a:xfrm>
+          <a:prstGeom prst="rect">
+            <a:avLst/>
+          </a:prstGeom>
+          <a:noFill/>
+        </p:spPr>
+        <p:txBody>
+          <a:bodyPr wrap="square">
+            <a:spAutoFit/>
+          </a:bodyPr>
+          <a:lstStyle/>
+          <a:p>
+            <a:r>
+              <a:rPr sz="2600" b="1">
+                <a:solidFill>
+                  <a:srgbClr val="14503B"/>
                 </a:solidFill>
                 <a:latin typeface="Tahoma"/>
               </a:rPr>
-              <a:t>•  December 2025 was the peak month with $413k in revenue.</a:t>
-            </a:r>
-          </a:p>
-          <a:p>
-            <a:pPr algn="l">
-              <a:spcAft>
-                <a:spcPts val="700"/>
-              </a:spcAft>
-            </a:pPr>
+              <a:t>$232k</a:t>
+            </a:r>
+          </a:p>
+        </p:txBody>
+      </p:sp>
+      <p:sp>
+        <p:nvSpPr>
+          <p:cNvPr id="14" name="TextBox 13"/>
+          <p:cNvSpPr txBox="1"/>
+          <p:nvPr/>
+        </p:nvSpPr>
+        <p:spPr>
+          <a:xfrm>
+            <a:off x="6301587" y="5468112"/>
+            <a:ext cx="2510713" cy="1417320"/>
+          </a:xfrm>
+          <a:prstGeom prst="rect">
+            <a:avLst/>
+          </a:prstGeom>
+          <a:noFill/>
+        </p:spPr>
+        <p:txBody>
+          <a:bodyPr wrap="square">
+            <a:spAutoFit/>
+          </a:bodyPr>
+          <a:lstStyle/>
+          <a:p>
             <a:r>
               <a:rPr sz="1100" b="0">
                 <a:solidFill>
-                  <a:srgbClr val="3C4450"/>
+                  <a:srgbClr val="7A828C"/>
                 </a:solidFill>
                 <a:latin typeface="Tahoma"/>
               </a:rPr>
-              <a:t>•  Recent months show a recovery trend from lower figures earlier in 2026.</a:t>
+              <a:t>Lowest month (2026-02)</a:t>
+            </a:r>
+          </a:p>
+        </p:txBody>
+      </p:sp>
+      <p:sp>
+        <p:nvSpPr>
+          <p:cNvPr id="15" name="Rectangle 14"/>
+          <p:cNvSpPr/>
+          <p:nvPr/>
+        </p:nvSpPr>
+        <p:spPr>
+          <a:xfrm>
+            <a:off x="9223781" y="4754880"/>
+            <a:ext cx="2510713" cy="50800"/>
+          </a:xfrm>
+          <a:prstGeom prst="rect">
+            <a:avLst/>
+          </a:prstGeom>
+          <a:solidFill>
+            <a:srgbClr val="1E7D55"/>
+          </a:solidFill>
+          <a:ln>
+            <a:noFill/>
+          </a:ln>
+          <a:effectLst/>
+        </p:spPr>
+        <p:style>
+          <a:lnRef idx="1">
+            <a:schemeClr val="accent1"/>
+          </a:lnRef>
+          <a:fillRef idx="3">
+            <a:schemeClr val="accent1"/>
+          </a:fillRef>
+          <a:effectRef idx="2">
+            <a:schemeClr val="accent1"/>
+          </a:effectRef>
+          <a:fontRef idx="minor">
+            <a:schemeClr val="lt1"/>
+          </a:fontRef>
+        </p:style>
+        <p:txBody>
+          <a:bodyPr rtlCol="0" anchor="ctr"/>
+          <a:lstStyle/>
+          <a:p>
+            <a:pPr algn="ctr"/>
+          </a:p>
+        </p:txBody>
+      </p:sp>
+      <p:sp>
+        <p:nvSpPr>
+          <p:cNvPr id="16" name="TextBox 15"/>
+          <p:cNvSpPr txBox="1"/>
+          <p:nvPr/>
+        </p:nvSpPr>
+        <p:spPr>
+          <a:xfrm>
+            <a:off x="9223781" y="4846320"/>
+            <a:ext cx="2510713" cy="640080"/>
+          </a:xfrm>
+          <a:prstGeom prst="rect">
+            <a:avLst/>
+          </a:prstGeom>
+          <a:noFill/>
+        </p:spPr>
+        <p:txBody>
+          <a:bodyPr wrap="square">
+            <a:spAutoFit/>
+          </a:bodyPr>
+          <a:lstStyle/>
+          <a:p>
+            <a:r>
+              <a:rPr sz="2600" b="1">
+                <a:solidFill>
+                  <a:srgbClr val="14503B"/>
+                </a:solidFill>
+                <a:latin typeface="Tahoma"/>
+              </a:rPr>
+              <a:t>+$51k</a:t>
+            </a:r>
+          </a:p>
+        </p:txBody>
+      </p:sp>
+      <p:sp>
+        <p:nvSpPr>
+          <p:cNvPr id="17" name="TextBox 16"/>
+          <p:cNvSpPr txBox="1"/>
+          <p:nvPr/>
+        </p:nvSpPr>
+        <p:spPr>
+          <a:xfrm>
+            <a:off x="9223781" y="5468112"/>
+            <a:ext cx="2510713" cy="1417320"/>
+          </a:xfrm>
+          <a:prstGeom prst="rect">
+            <a:avLst/>
+          </a:prstGeom>
+          <a:noFill/>
+        </p:spPr>
+        <p:txBody>
+          <a:bodyPr wrap="square">
+            <a:spAutoFit/>
+          </a:bodyPr>
+          <a:lstStyle/>
+          <a:p>
+            <a:r>
+              <a:rPr sz="1100" b="0">
+                <a:solidFill>
+                  <a:srgbClr val="7A828C"/>
+                </a:solidFill>
+                <a:latin typeface="Tahoma"/>
+              </a:rPr>
+              <a:t>Change since 2025-06</a:t>
             </a:r>
           </a:p>
         </p:txBody>
@@ -3824,7 +4122,7 @@
             <a:r>
               <a:rPr sz="1300" b="1">
                 <a:solidFill>
-                  <a:srgbClr val="A61E4D"/>
+                  <a:srgbClr val="1E7D55"/>
                 </a:solidFill>
                 <a:latin typeface="Tahoma"/>
               </a:rPr>
@@ -3858,11 +4156,11 @@
             <a:r>
               <a:rPr sz="3000" b="1">
                 <a:solidFill>
-                  <a:srgbClr val="2E0E1E"/>
+                  <a:srgbClr val="14503B"/>
                 </a:solidFill>
                 <a:latin typeface="Tahoma"/>
               </a:rPr>
-              <a:t>Organic Search leads with $103k, dominating 33.9% of total revenue.</a:t>
+              <a:t>Organic Search leads with $103k, accounting for 33.9% of total revenue.</a:t>
             </a:r>
           </a:p>
         </p:txBody>
@@ -3917,8 +4215,8 @@
         </p:blipFill>
         <p:spPr>
           <a:xfrm>
-            <a:off x="914400" y="1554480"/>
-            <a:ext cx="10332720" cy="3061547"/>
+            <a:off x="457200" y="1783080"/>
+            <a:ext cx="6949440" cy="3563815"/>
           </a:xfrm>
           <a:prstGeom prst="rect">
             <a:avLst/>
@@ -3927,20 +4225,54 @@
       </p:pic>
       <p:sp>
         <p:nvSpPr>
-          <p:cNvPr id="6" name="Rectangle 5"/>
+          <p:cNvPr id="6" name="TextBox 5"/>
+          <p:cNvSpPr txBox="1"/>
+          <p:nvPr/>
+        </p:nvSpPr>
+        <p:spPr>
+          <a:xfrm>
+            <a:off x="457200" y="5486400"/>
+            <a:ext cx="6949440" cy="868680"/>
+          </a:xfrm>
+          <a:prstGeom prst="rect">
+            <a:avLst/>
+          </a:prstGeom>
+          <a:noFill/>
+        </p:spPr>
+        <p:txBody>
+          <a:bodyPr wrap="square">
+            <a:spAutoFit/>
+          </a:bodyPr>
+          <a:lstStyle/>
+          <a:p>
+            <a:r>
+              <a:rPr sz="1100" b="0">
+                <a:solidFill>
+                  <a:srgbClr val="7A828C"/>
+                </a:solidFill>
+                <a:latin typeface="Tahoma"/>
+              </a:rPr>
+              <a:t>In May 2026, Organic Search generated $103k, making it the top channel and representing 33.9% of total revenue. Email follows closely with $83k, while Paid Search contributes $74k. The biggest mover is Email, increasing by $6k from the previous month, indicating strong growth in this channel.</a:t>
+            </a:r>
+          </a:p>
+        </p:txBody>
+      </p:sp>
+      <p:sp>
+        <p:nvSpPr>
+          <p:cNvPr id="7" name="Rectangle 6"/>
           <p:cNvSpPr/>
           <p:nvPr/>
         </p:nvSpPr>
         <p:spPr>
           <a:xfrm>
-            <a:off x="457200" y="4754880"/>
-            <a:ext cx="3454298" cy="50800"/>
+            <a:off x="7772400" y="1783080"/>
+            <a:ext cx="3931920" cy="457200"/>
           </a:xfrm>
           <a:prstGeom prst="rect">
             <a:avLst/>
           </a:prstGeom>
           <a:solidFill>
-            <a:srgbClr val="A61E4D"/>
+            <a:srgbClr val="14503B"/>
           </a:solidFill>
           <a:ln>
             <a:noFill/>
@@ -3962,100 +4294,43 @@
           </a:fontRef>
         </p:style>
         <p:txBody>
-          <a:bodyPr rtlCol="0" anchor="ctr"/>
+          <a:bodyPr rtlCol="0" anchor="ctr" lIns="201168" tIns="18288" bIns="18288"/>
           <a:lstStyle/>
           <a:p>
             <a:pPr algn="ctr"/>
-          </a:p>
-        </p:txBody>
-      </p:sp>
-      <p:sp>
-        <p:nvSpPr>
-          <p:cNvPr id="7" name="TextBox 6"/>
-          <p:cNvSpPr txBox="1"/>
-          <p:nvPr/>
-        </p:nvSpPr>
-        <p:spPr>
-          <a:xfrm>
-            <a:off x="457200" y="4846320"/>
-            <a:ext cx="3454298" cy="640080"/>
-          </a:xfrm>
-          <a:prstGeom prst="rect">
-            <a:avLst/>
-          </a:prstGeom>
-          <a:noFill/>
-        </p:spPr>
-        <p:txBody>
-          <a:bodyPr wrap="square">
-            <a:spAutoFit/>
-          </a:bodyPr>
-          <a:lstStyle/>
-          <a:p>
-            <a:r>
-              <a:rPr sz="2700" b="1">
-                <a:solidFill>
-                  <a:srgbClr val="2E0E1E"/>
+            <a:r>
+              <a:rPr sz="1200" b="1">
+                <a:solidFill>
+                  <a:srgbClr val="FFFFFF"/>
                 </a:solidFill>
                 <a:latin typeface="Tahoma"/>
               </a:rPr>
-              <a:t>$103k</a:t>
-            </a:r>
-          </a:p>
-        </p:txBody>
-      </p:sp>
-      <p:sp>
-        <p:nvSpPr>
-          <p:cNvPr id="8" name="TextBox 7"/>
-          <p:cNvSpPr txBox="1"/>
-          <p:nvPr/>
-        </p:nvSpPr>
-        <p:spPr>
-          <a:xfrm>
-            <a:off x="457200" y="5468112"/>
-            <a:ext cx="3454298" cy="1417320"/>
-          </a:xfrm>
-          <a:prstGeom prst="rect">
-            <a:avLst/>
-          </a:prstGeom>
-          <a:noFill/>
-        </p:spPr>
-        <p:txBody>
-          <a:bodyPr wrap="square">
-            <a:spAutoFit/>
-          </a:bodyPr>
-          <a:lstStyle/>
-          <a:p>
-            <a:r>
-              <a:rPr sz="1100" b="0">
-                <a:solidFill>
-                  <a:srgbClr val="7A828C"/>
-                </a:solidFill>
-                <a:latin typeface="Tahoma"/>
-              </a:rPr>
-              <a:t>Organic Search is the largest channel with $103k revenue.</a:t>
-            </a:r>
-          </a:p>
-        </p:txBody>
-      </p:sp>
-      <p:sp>
-        <p:nvSpPr>
-          <p:cNvPr id="9" name="Rectangle 8"/>
+              <a:t>KEY TAKEAWAY</a:t>
+            </a:r>
+          </a:p>
+        </p:txBody>
+      </p:sp>
+      <p:sp>
+        <p:nvSpPr>
+          <p:cNvPr id="8" name="Rectangle 7"/>
           <p:cNvSpPr/>
           <p:nvPr/>
         </p:nvSpPr>
         <p:spPr>
           <a:xfrm>
-            <a:off x="4368698" y="4754880"/>
-            <a:ext cx="3454298" cy="50800"/>
+            <a:off x="7772400" y="2240280"/>
+            <a:ext cx="3931920" cy="3200400"/>
           </a:xfrm>
           <a:prstGeom prst="rect">
             <a:avLst/>
           </a:prstGeom>
           <a:solidFill>
-            <a:srgbClr val="A61E4D"/>
+            <a:srgbClr val="E6E8EB"/>
           </a:solidFill>
-          <a:ln>
-            <a:noFill/>
+          <a:ln w="9525">
+            <a:solidFill>
+              <a:srgbClr val="C0C5C9"/>
+            </a:solidFill>
           </a:ln>
           <a:effectLst/>
         </p:spPr>
@@ -4074,189 +4349,70 @@
           </a:fontRef>
         </p:style>
         <p:txBody>
-          <a:bodyPr rtlCol="0" anchor="ctr"/>
-          <a:lstStyle/>
-          <a:p>
-            <a:pPr algn="ctr"/>
-          </a:p>
-        </p:txBody>
-      </p:sp>
-      <p:sp>
-        <p:nvSpPr>
-          <p:cNvPr id="10" name="TextBox 9"/>
-          <p:cNvSpPr txBox="1"/>
-          <p:nvPr/>
-        </p:nvSpPr>
-        <p:spPr>
-          <a:xfrm>
-            <a:off x="4368698" y="4846320"/>
-            <a:ext cx="3454298" cy="640080"/>
-          </a:xfrm>
-          <a:prstGeom prst="rect">
-            <a:avLst/>
-          </a:prstGeom>
-          <a:noFill/>
-        </p:spPr>
-        <p:txBody>
-          <a:bodyPr wrap="square">
-            <a:spAutoFit/>
-          </a:bodyPr>
-          <a:lstStyle/>
-          <a:p>
-            <a:r>
-              <a:rPr sz="2700" b="1">
-                <a:solidFill>
-                  <a:srgbClr val="2E0E1E"/>
+          <a:bodyPr rtlCol="0" anchor="t" wrap="square" lIns="219456" rIns="219456" tIns="237744"/>
+          <a:lstStyle/>
+          <a:p>
+            <a:pPr algn="l">
+              <a:spcAft>
+                <a:spcPts val="1600"/>
+              </a:spcAft>
+            </a:pPr>
+            <a:r>
+              <a:rPr sz="1300" b="0">
+                <a:solidFill>
+                  <a:srgbClr val="3C4450"/>
                 </a:solidFill>
                 <a:latin typeface="Tahoma"/>
               </a:rPr>
-              <a:t>$83k</a:t>
-            </a:r>
-          </a:p>
-        </p:txBody>
-      </p:sp>
-      <p:sp>
-        <p:nvSpPr>
-          <p:cNvPr id="11" name="TextBox 10"/>
-          <p:cNvSpPr txBox="1"/>
-          <p:nvPr/>
-        </p:nvSpPr>
-        <p:spPr>
-          <a:xfrm>
-            <a:off x="4368698" y="5468112"/>
-            <a:ext cx="3454298" cy="1417320"/>
-          </a:xfrm>
-          <a:prstGeom prst="rect">
-            <a:avLst/>
-          </a:prstGeom>
-          <a:noFill/>
-        </p:spPr>
-        <p:txBody>
-          <a:bodyPr wrap="square">
-            <a:spAutoFit/>
-          </a:bodyPr>
-          <a:lstStyle/>
-          <a:p>
+              <a:t>Focusing on Email's growth potential can enhance overall revenue performance.</a:t>
+            </a:r>
+          </a:p>
+          <a:p>
+            <a:pPr algn="l">
+              <a:spcAft>
+                <a:spcPts val="700"/>
+              </a:spcAft>
+            </a:pPr>
             <a:r>
               <a:rPr sz="1100" b="0">
                 <a:solidFill>
-                  <a:srgbClr val="7A828C"/>
+                  <a:srgbClr val="3C4450"/>
                 </a:solidFill>
                 <a:latin typeface="Tahoma"/>
               </a:rPr>
-              <a:t>Email is the biggest mover, increasing by +$6k to $83k.</a:t>
-            </a:r>
-          </a:p>
-        </p:txBody>
-      </p:sp>
-      <p:sp>
-        <p:nvSpPr>
-          <p:cNvPr id="12" name="Rectangle 11"/>
-          <p:cNvSpPr/>
-          <p:nvPr/>
-        </p:nvSpPr>
-        <p:spPr>
-          <a:xfrm>
-            <a:off x="8280196" y="4754880"/>
-            <a:ext cx="3454298" cy="50800"/>
-          </a:xfrm>
-          <a:prstGeom prst="rect">
-            <a:avLst/>
-          </a:prstGeom>
-          <a:solidFill>
-            <a:srgbClr val="A61E4D"/>
-          </a:solidFill>
-          <a:ln>
-            <a:noFill/>
-          </a:ln>
-          <a:effectLst/>
-        </p:spPr>
-        <p:style>
-          <a:lnRef idx="1">
-            <a:schemeClr val="accent1"/>
-          </a:lnRef>
-          <a:fillRef idx="3">
-            <a:schemeClr val="accent1"/>
-          </a:fillRef>
-          <a:effectRef idx="2">
-            <a:schemeClr val="accent1"/>
-          </a:effectRef>
-          <a:fontRef idx="minor">
-            <a:schemeClr val="lt1"/>
-          </a:fontRef>
-        </p:style>
-        <p:txBody>
-          <a:bodyPr rtlCol="0" anchor="ctr"/>
-          <a:lstStyle/>
-          <a:p>
-            <a:pPr algn="ctr"/>
-          </a:p>
-        </p:txBody>
-      </p:sp>
-      <p:sp>
-        <p:nvSpPr>
-          <p:cNvPr id="13" name="TextBox 12"/>
-          <p:cNvSpPr txBox="1"/>
-          <p:nvPr/>
-        </p:nvSpPr>
-        <p:spPr>
-          <a:xfrm>
-            <a:off x="8280196" y="4846320"/>
-            <a:ext cx="3454298" cy="640080"/>
-          </a:xfrm>
-          <a:prstGeom prst="rect">
-            <a:avLst/>
-          </a:prstGeom>
-          <a:noFill/>
-        </p:spPr>
-        <p:txBody>
-          <a:bodyPr wrap="square">
-            <a:spAutoFit/>
-          </a:bodyPr>
-          <a:lstStyle/>
-          <a:p>
-            <a:r>
-              <a:rPr sz="2700" b="1">
-                <a:solidFill>
-                  <a:srgbClr val="2E0E1E"/>
+              <a:t>•  Organic Search dominates with $103k, leading all channels.</a:t>
+            </a:r>
+          </a:p>
+          <a:p>
+            <a:pPr algn="l">
+              <a:spcAft>
+                <a:spcPts val="700"/>
+              </a:spcAft>
+            </a:pPr>
+            <a:r>
+              <a:rPr sz="1100" b="0">
+                <a:solidFill>
+                  <a:srgbClr val="3C4450"/>
                 </a:solidFill>
                 <a:latin typeface="Tahoma"/>
               </a:rPr>
-              <a:t>$74k</a:t>
-            </a:r>
-          </a:p>
-        </p:txBody>
-      </p:sp>
-      <p:sp>
-        <p:nvSpPr>
-          <p:cNvPr id="14" name="TextBox 13"/>
-          <p:cNvSpPr txBox="1"/>
-          <p:nvPr/>
-        </p:nvSpPr>
-        <p:spPr>
-          <a:xfrm>
-            <a:off x="8280196" y="5468112"/>
-            <a:ext cx="3454298" cy="1417320"/>
-          </a:xfrm>
-          <a:prstGeom prst="rect">
-            <a:avLst/>
-          </a:prstGeom>
-          <a:noFill/>
-        </p:spPr>
-        <p:txBody>
-          <a:bodyPr wrap="square">
-            <a:spAutoFit/>
-          </a:bodyPr>
-          <a:lstStyle/>
-          <a:p>
+              <a:t>•  Email shows significant growth, up $6k from April.</a:t>
+            </a:r>
+          </a:p>
+          <a:p>
+            <a:pPr algn="l">
+              <a:spcAft>
+                <a:spcPts val="700"/>
+              </a:spcAft>
+            </a:pPr>
             <a:r>
               <a:rPr sz="1100" b="0">
                 <a:solidFill>
-                  <a:srgbClr val="7A828C"/>
+                  <a:srgbClr val="3C4450"/>
                 </a:solidFill>
                 <a:latin typeface="Tahoma"/>
               </a:rPr>
-              <a:t>Social is the only channel to decline, down by -$6.</a:t>
+              <a:t>•  Total revenue concentration remains high in top three channels.</a:t>
             </a:r>
           </a:p>
         </p:txBody>
@@ -4304,7 +4460,7 @@
             <a:r>
               <a:rPr sz="1300" b="1">
                 <a:solidFill>
-                  <a:srgbClr val="A61E4D"/>
+                  <a:srgbClr val="1E7D55"/>
                 </a:solidFill>
                 <a:latin typeface="Tahoma"/>
               </a:rPr>
@@ -4338,7 +4494,7 @@
             <a:r>
               <a:rPr sz="3000" b="1">
                 <a:solidFill>
-                  <a:srgbClr val="2E0E1E"/>
+                  <a:srgbClr val="14503B"/>
                 </a:solidFill>
                 <a:latin typeface="Tahoma"/>
               </a:rPr>
@@ -4415,7 +4571,7 @@
                 </a:solidFill>
                 <a:latin typeface="Tahoma"/>
               </a:rPr>
-              <a:t>1.   Enhance investment in Organic Search to capitalize on its $103k contribution and 33.9% share.</a:t>
+              <a:t>1.   Increase investment in Organic Search to capitalize on its $103k contribution and 33.9% share.</a:t>
             </a:r>
           </a:p>
           <a:p>
@@ -4431,7 +4587,7 @@
                 </a:solidFill>
                 <a:latin typeface="Tahoma"/>
               </a:rPr>
-              <a:t>2.   Address the decline in Social by reallocating resources or optimizing content strategy to recover the -$6 loss.</a:t>
+              <a:t>2.   Analyze and address the decline in Social, which decreased by -$6, to prevent further losses.</a:t>
             </a:r>
           </a:p>
           <a:p>
@@ -4447,7 +4603,7 @@
                 </a:solidFill>
                 <a:latin typeface="Tahoma"/>
               </a:rPr>
-              <a:t>3.   Monitor revenue trends closely to sustain the growth momentum of +4.7% from $290k to $303k.</a:t>
+              <a:t>3.   Enhance marketing strategies to sustain the overall revenue growth of $303k, reflecting a +4.7% increase.</a:t>
             </a:r>
           </a:p>
           <a:p>
@@ -4463,7 +4619,7 @@
                 </a:solidFill>
                 <a:latin typeface="Tahoma"/>
               </a:rPr>
-              <a:t>4.   Implement targeted marketing campaigns to further boost underperforming channels and maximize overall revenue.</a:t>
+              <a:t>4.   Conduct a channel performance review to identify opportunities for improvement across all revenue streams.</a:t>
             </a:r>
           </a:p>
         </p:txBody>

--- a/app/examples/marketing_analytics/report.pptx
+++ b/app/examples/marketing_analytics/report.pptx
@@ -3144,8 +3144,8 @@
         </p:nvSpPr>
         <p:spPr>
           <a:xfrm>
-            <a:off x="777240" y="777240"/>
-            <a:ext cx="10607040" cy="1828800"/>
+            <a:off x="777240" y="914400"/>
+            <a:ext cx="10607040" cy="5029200"/>
           </a:xfrm>
           <a:prstGeom prst="rect">
             <a:avLst/>
@@ -3153,11 +3153,16 @@
           <a:noFill/>
         </p:spPr>
         <p:txBody>
-          <a:bodyPr wrap="square">
+          <a:bodyPr wrap="square" anchor="ctr">
             <a:spAutoFit/>
           </a:bodyPr>
           <a:lstStyle/>
           <a:p>
+            <a:pPr>
+              <a:spcAft>
+                <a:spcPts val="1400"/>
+              </a:spcAft>
+            </a:pPr>
             <a:r>
               <a:rPr sz="4600" b="1">
                 <a:solidFill>
@@ -3168,73 +3173,6 @@
               <a:t>May 2026 Revenue Insights</a:t>
             </a:r>
           </a:p>
-        </p:txBody>
-      </p:sp>
-      <p:sp>
-        <p:nvSpPr>
-          <p:cNvPr id="4" name="Rectangle 3"/>
-          <p:cNvSpPr/>
-          <p:nvPr/>
-        </p:nvSpPr>
-        <p:spPr>
-          <a:xfrm>
-            <a:off x="822960" y="2743200"/>
-            <a:ext cx="1554480" cy="76200"/>
-          </a:xfrm>
-          <a:prstGeom prst="rect">
-            <a:avLst/>
-          </a:prstGeom>
-          <a:solidFill>
-            <a:srgbClr val="1E7D55"/>
-          </a:solidFill>
-          <a:ln>
-            <a:noFill/>
-          </a:ln>
-          <a:effectLst/>
-        </p:spPr>
-        <p:style>
-          <a:lnRef idx="1">
-            <a:schemeClr val="accent1"/>
-          </a:lnRef>
-          <a:fillRef idx="3">
-            <a:schemeClr val="accent1"/>
-          </a:fillRef>
-          <a:effectRef idx="2">
-            <a:schemeClr val="accent1"/>
-          </a:effectRef>
-          <a:fontRef idx="minor">
-            <a:schemeClr val="lt1"/>
-          </a:fontRef>
-        </p:style>
-        <p:txBody>
-          <a:bodyPr rtlCol="0" anchor="ctr"/>
-          <a:lstStyle/>
-          <a:p>
-            <a:pPr algn="ctr"/>
-          </a:p>
-        </p:txBody>
-      </p:sp>
-      <p:sp>
-        <p:nvSpPr>
-          <p:cNvPr id="5" name="TextBox 4"/>
-          <p:cNvSpPr txBox="1"/>
-          <p:nvPr/>
-        </p:nvSpPr>
-        <p:spPr>
-          <a:xfrm>
-            <a:off x="777240" y="2971800"/>
-            <a:ext cx="10607040" cy="548640"/>
-          </a:xfrm>
-          <a:prstGeom prst="rect">
-            <a:avLst/>
-          </a:prstGeom>
-          <a:noFill/>
-        </p:spPr>
-        <p:txBody>
-          <a:bodyPr wrap="square">
-            <a:spAutoFit/>
-          </a:bodyPr>
-          <a:lstStyle/>
           <a:p>
             <a:r>
               <a:rPr sz="1700" b="0">
